--- a/Network/5G Learning report.pptx
+++ b/Network/5G Learning report.pptx
@@ -2,35 +2,40 @@
 <file path=ppt/presentation.xml><?xml version="1.0" encoding="utf-8"?>
 <p:presentation xmlns:a="http://schemas.openxmlformats.org/drawingml/2006/main" xmlns:r="http://schemas.openxmlformats.org/officeDocument/2006/relationships" xmlns:mc="http://schemas.openxmlformats.org/markup-compatibility/2006" xmlns:mv="urn:schemas-microsoft-com:mac:vml" xmlns:p="http://schemas.openxmlformats.org/presentationml/2006/main" xmlns:c="http://schemas.openxmlformats.org/drawingml/2006/chart" xmlns:dgm="http://schemas.openxmlformats.org/drawingml/2006/diagram" xmlns:o="urn:schemas-microsoft-com:office:office" xmlns:v="urn:schemas-microsoft-com:vml" xmlns:pvml="urn:schemas-microsoft-com:office:powerpoint" xmlns:com="http://schemas.openxmlformats.org/drawingml/2006/compatibility" xmlns:p14="http://schemas.microsoft.com/office/powerpoint/2010/main" xmlns:p15="http://schemas.microsoft.com/office/powerpoint/2012/main" xmlns:ahyp="http://schemas.microsoft.com/office/drawing/2018/hyperlinkcolor" autoCompressPictures="0" embedTrueTypeFonts="1" strictFirstAndLastChars="0" saveSubsetFonts="1">
   <p:sldMasterIdLst>
-    <p:sldMasterId id="2147483659" r:id="rId4"/>
+    <p:sldMasterId id="2147483659" r:id="rId5"/>
   </p:sldMasterIdLst>
   <p:notesMasterIdLst>
-    <p:notesMasterId r:id="rId5"/>
+    <p:notesMasterId r:id="rId6"/>
   </p:notesMasterIdLst>
   <p:sldIdLst>
-    <p:sldId id="256" r:id="rId6"/>
-    <p:sldId id="257" r:id="rId7"/>
-    <p:sldId id="258" r:id="rId8"/>
-    <p:sldId id="259" r:id="rId9"/>
-    <p:sldId id="260" r:id="rId10"/>
-    <p:sldId id="261" r:id="rId11"/>
-    <p:sldId id="262" r:id="rId12"/>
-    <p:sldId id="263" r:id="rId13"/>
-    <p:sldId id="264" r:id="rId14"/>
-    <p:sldId id="265" r:id="rId15"/>
-    <p:sldId id="266" r:id="rId16"/>
-    <p:sldId id="267" r:id="rId17"/>
-    <p:sldId id="268" r:id="rId18"/>
+    <p:sldId id="256" r:id="rId7"/>
+    <p:sldId id="257" r:id="rId8"/>
+    <p:sldId id="258" r:id="rId9"/>
+    <p:sldId id="259" r:id="rId10"/>
+    <p:sldId id="260" r:id="rId11"/>
+    <p:sldId id="261" r:id="rId12"/>
+    <p:sldId id="262" r:id="rId13"/>
+    <p:sldId id="263" r:id="rId14"/>
+    <p:sldId id="264" r:id="rId15"/>
+    <p:sldId id="265" r:id="rId16"/>
+    <p:sldId id="266" r:id="rId17"/>
+    <p:sldId id="267" r:id="rId18"/>
+    <p:sldId id="268" r:id="rId19"/>
+    <p:sldId id="269" r:id="rId20"/>
+    <p:sldId id="270" r:id="rId21"/>
+    <p:sldId id="271" r:id="rId22"/>
+    <p:sldId id="272" r:id="rId23"/>
+    <p:sldId id="273" r:id="rId24"/>
   </p:sldIdLst>
   <p:sldSz cy="5143500" cx="9144000"/>
   <p:notesSz cx="6858000" cy="9144000"/>
   <p:embeddedFontLst>
     <p:embeddedFont>
       <p:font typeface="Ubuntu"/>
-      <p:regular r:id="rId19"/>
-      <p:bold r:id="rId20"/>
-      <p:italic r:id="rId21"/>
-      <p:boldItalic r:id="rId22"/>
+      <p:regular r:id="rId25"/>
+      <p:bold r:id="rId26"/>
+      <p:italic r:id="rId27"/>
+      <p:boldItalic r:id="rId28"/>
     </p:embeddedFont>
   </p:embeddedFontLst>
   <p:defaultTextStyle>
@@ -924,7 +929,7 @@
       </p:grpSpPr>
       <p:sp>
         <p:nvSpPr>
-          <p:cNvPr id="135" name="Google Shape;135;g2b303618605_0_1:notes"/>
+          <p:cNvPr id="135" name="Google Shape;135;g2672cf55445_0_2:notes"/>
           <p:cNvSpPr/>
           <p:nvPr>
             <p:ph idx="2" type="sldImg"/>
@@ -959,7 +964,7 @@
       </p:sp>
       <p:sp>
         <p:nvSpPr>
-          <p:cNvPr id="136" name="Google Shape;136;g2b303618605_0_1:notes"/>
+          <p:cNvPr id="136" name="Google Shape;136;g2672cf55445_0_2:notes"/>
           <p:cNvSpPr txBox="1"/>
           <p:nvPr>
             <p:ph idx="1" type="body"/>
@@ -1009,7 +1014,7 @@
   <p:cSld>
     <p:spTree>
       <p:nvGrpSpPr>
-        <p:cNvPr id="144" name="Shape 144"/>
+        <p:cNvPr id="142" name="Shape 142"/>
         <p:cNvGrpSpPr/>
         <p:nvPr/>
       </p:nvGrpSpPr>
@@ -1023,7 +1028,7 @@
       </p:grpSpPr>
       <p:sp>
         <p:nvSpPr>
-          <p:cNvPr id="145" name="Google Shape;145;g2b303618605_0_7:notes"/>
+          <p:cNvPr id="143" name="Google Shape;143;g26749023da4_0_0:notes"/>
           <p:cNvSpPr/>
           <p:nvPr>
             <p:ph idx="2" type="sldImg"/>
@@ -1058,7 +1063,7 @@
       </p:sp>
       <p:sp>
         <p:nvSpPr>
-          <p:cNvPr id="146" name="Google Shape;146;g2b303618605_0_7:notes"/>
+          <p:cNvPr id="144" name="Google Shape;144;g26749023da4_0_0:notes"/>
           <p:cNvSpPr txBox="1"/>
           <p:nvPr>
             <p:ph idx="1" type="body"/>
@@ -1108,7 +1113,7 @@
   <p:cSld>
     <p:spTree>
       <p:nvGrpSpPr>
-        <p:cNvPr id="152" name="Shape 152"/>
+        <p:cNvPr id="147" name="Shape 147"/>
         <p:cNvGrpSpPr/>
         <p:nvPr/>
       </p:nvGrpSpPr>
@@ -1122,7 +1127,7 @@
       </p:grpSpPr>
       <p:sp>
         <p:nvSpPr>
-          <p:cNvPr id="153" name="Google Shape;153;g2670e339dcf_0_90:notes"/>
+          <p:cNvPr id="148" name="Google Shape;148;g2b303618605_0_1:notes"/>
           <p:cNvSpPr/>
           <p:nvPr>
             <p:ph idx="2" type="sldImg"/>
@@ -1157,7 +1162,502 @@
       </p:sp>
       <p:sp>
         <p:nvSpPr>
-          <p:cNvPr id="154" name="Google Shape;154;g2670e339dcf_0_90:notes"/>
+          <p:cNvPr id="149" name="Google Shape;149;g2b303618605_0_1:notes"/>
+          <p:cNvSpPr txBox="1"/>
+          <p:nvPr>
+            <p:ph idx="1" type="body"/>
+          </p:nvPr>
+        </p:nvSpPr>
+        <p:spPr>
+          <a:xfrm>
+            <a:off x="685800" y="4343400"/>
+            <a:ext cx="5486400" cy="4114800"/>
+          </a:xfrm>
+          <a:prstGeom prst="rect">
+            <a:avLst/>
+          </a:prstGeom>
+        </p:spPr>
+        <p:txBody>
+          <a:bodyPr anchorCtr="0" anchor="t" bIns="91425" lIns="91425" spcFirstLastPara="1" rIns="91425" wrap="square" tIns="91425">
+            <a:noAutofit/>
+          </a:bodyPr>
+          <a:lstStyle/>
+          <a:p>
+            <a:pPr indent="0" lvl="0" marL="0" rtl="0" algn="l">
+              <a:spcBef>
+                <a:spcPts val="0"/>
+              </a:spcBef>
+              <a:spcAft>
+                <a:spcPts val="0"/>
+              </a:spcAft>
+              <a:buNone/>
+            </a:pPr>
+            <a:r>
+              <a:t/>
+            </a:r>
+            <a:endParaRPr/>
+          </a:p>
+        </p:txBody>
+      </p:sp>
+    </p:spTree>
+  </p:cSld>
+  <p:clrMapOvr>
+    <a:masterClrMapping/>
+  </p:clrMapOvr>
+</p:notes>
+</file>
+
+<file path=ppt/notesSlides/notesSlide14.xml><?xml version="1.0" encoding="utf-8"?>
+<p:notes xmlns:a="http://schemas.openxmlformats.org/drawingml/2006/main" xmlns:r="http://schemas.openxmlformats.org/officeDocument/2006/relationships" xmlns:mc="http://schemas.openxmlformats.org/markup-compatibility/2006" xmlns:mv="urn:schemas-microsoft-com:mac:vml" xmlns:p="http://schemas.openxmlformats.org/presentationml/2006/main" xmlns:c="http://schemas.openxmlformats.org/drawingml/2006/chart" xmlns:dgm="http://schemas.openxmlformats.org/drawingml/2006/diagram" xmlns:o="urn:schemas-microsoft-com:office:office" xmlns:v="urn:schemas-microsoft-com:vml" xmlns:pvml="urn:schemas-microsoft-com:office:powerpoint" xmlns:com="http://schemas.openxmlformats.org/drawingml/2006/compatibility" xmlns:p14="http://schemas.microsoft.com/office/powerpoint/2010/main" xmlns:p15="http://schemas.microsoft.com/office/powerpoint/2012/main" xmlns:ahyp="http://schemas.microsoft.com/office/drawing/2018/hyperlinkcolor" showMasterPhAnim="0" showMasterSp="0">
+  <p:cSld>
+    <p:spTree>
+      <p:nvGrpSpPr>
+        <p:cNvPr id="157" name="Shape 157"/>
+        <p:cNvGrpSpPr/>
+        <p:nvPr/>
+      </p:nvGrpSpPr>
+      <p:grpSpPr>
+        <a:xfrm>
+          <a:off x="0" y="0"/>
+          <a:ext cx="0" cy="0"/>
+          <a:chOff x="0" y="0"/>
+          <a:chExt cx="0" cy="0"/>
+        </a:xfrm>
+      </p:grpSpPr>
+      <p:sp>
+        <p:nvSpPr>
+          <p:cNvPr id="158" name="Google Shape;158;g2b303618605_0_7:notes"/>
+          <p:cNvSpPr/>
+          <p:nvPr>
+            <p:ph idx="2" type="sldImg"/>
+          </p:nvPr>
+        </p:nvSpPr>
+        <p:spPr>
+          <a:xfrm>
+            <a:off x="381300" y="685800"/>
+            <a:ext cx="6096000" cy="3429000"/>
+          </a:xfrm>
+          <a:custGeom>
+            <a:rect b="b" l="l" r="r" t="t"/>
+            <a:pathLst>
+              <a:path extrusionOk="0" h="120000" w="120000">
+                <a:moveTo>
+                  <a:pt x="0" y="0"/>
+                </a:moveTo>
+                <a:lnTo>
+                  <a:pt x="120000" y="0"/>
+                </a:lnTo>
+                <a:lnTo>
+                  <a:pt x="120000" y="120000"/>
+                </a:lnTo>
+                <a:lnTo>
+                  <a:pt x="0" y="120000"/>
+                </a:lnTo>
+                <a:close/>
+              </a:path>
+            </a:pathLst>
+          </a:custGeom>
+        </p:spPr>
+      </p:sp>
+      <p:sp>
+        <p:nvSpPr>
+          <p:cNvPr id="159" name="Google Shape;159;g2b303618605_0_7:notes"/>
+          <p:cNvSpPr txBox="1"/>
+          <p:nvPr>
+            <p:ph idx="1" type="body"/>
+          </p:nvPr>
+        </p:nvSpPr>
+        <p:spPr>
+          <a:xfrm>
+            <a:off x="685800" y="4343400"/>
+            <a:ext cx="5486400" cy="4114800"/>
+          </a:xfrm>
+          <a:prstGeom prst="rect">
+            <a:avLst/>
+          </a:prstGeom>
+        </p:spPr>
+        <p:txBody>
+          <a:bodyPr anchorCtr="0" anchor="t" bIns="91425" lIns="91425" spcFirstLastPara="1" rIns="91425" wrap="square" tIns="91425">
+            <a:noAutofit/>
+          </a:bodyPr>
+          <a:lstStyle/>
+          <a:p>
+            <a:pPr indent="0" lvl="0" marL="0" rtl="0" algn="l">
+              <a:spcBef>
+                <a:spcPts val="0"/>
+              </a:spcBef>
+              <a:spcAft>
+                <a:spcPts val="0"/>
+              </a:spcAft>
+              <a:buNone/>
+            </a:pPr>
+            <a:r>
+              <a:t/>
+            </a:r>
+            <a:endParaRPr/>
+          </a:p>
+        </p:txBody>
+      </p:sp>
+    </p:spTree>
+  </p:cSld>
+  <p:clrMapOvr>
+    <a:masterClrMapping/>
+  </p:clrMapOvr>
+</p:notes>
+</file>
+
+<file path=ppt/notesSlides/notesSlide15.xml><?xml version="1.0" encoding="utf-8"?>
+<p:notes xmlns:a="http://schemas.openxmlformats.org/drawingml/2006/main" xmlns:r="http://schemas.openxmlformats.org/officeDocument/2006/relationships" xmlns:mc="http://schemas.openxmlformats.org/markup-compatibility/2006" xmlns:mv="urn:schemas-microsoft-com:mac:vml" xmlns:p="http://schemas.openxmlformats.org/presentationml/2006/main" xmlns:c="http://schemas.openxmlformats.org/drawingml/2006/chart" xmlns:dgm="http://schemas.openxmlformats.org/drawingml/2006/diagram" xmlns:o="urn:schemas-microsoft-com:office:office" xmlns:v="urn:schemas-microsoft-com:vml" xmlns:pvml="urn:schemas-microsoft-com:office:powerpoint" xmlns:com="http://schemas.openxmlformats.org/drawingml/2006/compatibility" xmlns:p14="http://schemas.microsoft.com/office/powerpoint/2010/main" xmlns:p15="http://schemas.microsoft.com/office/powerpoint/2012/main" xmlns:ahyp="http://schemas.microsoft.com/office/drawing/2018/hyperlinkcolor" showMasterPhAnim="0" showMasterSp="0">
+  <p:cSld>
+    <p:spTree>
+      <p:nvGrpSpPr>
+        <p:cNvPr id="165" name="Shape 165"/>
+        <p:cNvGrpSpPr/>
+        <p:nvPr/>
+      </p:nvGrpSpPr>
+      <p:grpSpPr>
+        <a:xfrm>
+          <a:off x="0" y="0"/>
+          <a:ext cx="0" cy="0"/>
+          <a:chOff x="0" y="0"/>
+          <a:chExt cx="0" cy="0"/>
+        </a:xfrm>
+      </p:grpSpPr>
+      <p:sp>
+        <p:nvSpPr>
+          <p:cNvPr id="166" name="Google Shape;166;g2670e339dcf_0_90:notes"/>
+          <p:cNvSpPr/>
+          <p:nvPr>
+            <p:ph idx="2" type="sldImg"/>
+          </p:nvPr>
+        </p:nvSpPr>
+        <p:spPr>
+          <a:xfrm>
+            <a:off x="381300" y="685800"/>
+            <a:ext cx="6096000" cy="3429000"/>
+          </a:xfrm>
+          <a:custGeom>
+            <a:rect b="b" l="l" r="r" t="t"/>
+            <a:pathLst>
+              <a:path extrusionOk="0" h="120000" w="120000">
+                <a:moveTo>
+                  <a:pt x="0" y="0"/>
+                </a:moveTo>
+                <a:lnTo>
+                  <a:pt x="120000" y="0"/>
+                </a:lnTo>
+                <a:lnTo>
+                  <a:pt x="120000" y="120000"/>
+                </a:lnTo>
+                <a:lnTo>
+                  <a:pt x="0" y="120000"/>
+                </a:lnTo>
+                <a:close/>
+              </a:path>
+            </a:pathLst>
+          </a:custGeom>
+        </p:spPr>
+      </p:sp>
+      <p:sp>
+        <p:nvSpPr>
+          <p:cNvPr id="167" name="Google Shape;167;g2670e339dcf_0_90:notes"/>
+          <p:cNvSpPr txBox="1"/>
+          <p:nvPr>
+            <p:ph idx="1" type="body"/>
+          </p:nvPr>
+        </p:nvSpPr>
+        <p:spPr>
+          <a:xfrm>
+            <a:off x="685800" y="4343400"/>
+            <a:ext cx="5486400" cy="4114800"/>
+          </a:xfrm>
+          <a:prstGeom prst="rect">
+            <a:avLst/>
+          </a:prstGeom>
+        </p:spPr>
+        <p:txBody>
+          <a:bodyPr anchorCtr="0" anchor="t" bIns="91425" lIns="91425" spcFirstLastPara="1" rIns="91425" wrap="square" tIns="91425">
+            <a:noAutofit/>
+          </a:bodyPr>
+          <a:lstStyle/>
+          <a:p>
+            <a:pPr indent="0" lvl="0" marL="0" rtl="0" algn="l">
+              <a:spcBef>
+                <a:spcPts val="0"/>
+              </a:spcBef>
+              <a:spcAft>
+                <a:spcPts val="0"/>
+              </a:spcAft>
+              <a:buNone/>
+            </a:pPr>
+            <a:r>
+              <a:t/>
+            </a:r>
+            <a:endParaRPr/>
+          </a:p>
+        </p:txBody>
+      </p:sp>
+    </p:spTree>
+  </p:cSld>
+  <p:clrMapOvr>
+    <a:masterClrMapping/>
+  </p:clrMapOvr>
+</p:notes>
+</file>
+
+<file path=ppt/notesSlides/notesSlide16.xml><?xml version="1.0" encoding="utf-8"?>
+<p:notes xmlns:a="http://schemas.openxmlformats.org/drawingml/2006/main" xmlns:r="http://schemas.openxmlformats.org/officeDocument/2006/relationships" xmlns:mc="http://schemas.openxmlformats.org/markup-compatibility/2006" xmlns:mv="urn:schemas-microsoft-com:mac:vml" xmlns:p="http://schemas.openxmlformats.org/presentationml/2006/main" xmlns:c="http://schemas.openxmlformats.org/drawingml/2006/chart" xmlns:dgm="http://schemas.openxmlformats.org/drawingml/2006/diagram" xmlns:o="urn:schemas-microsoft-com:office:office" xmlns:v="urn:schemas-microsoft-com:vml" xmlns:pvml="urn:schemas-microsoft-com:office:powerpoint" xmlns:com="http://schemas.openxmlformats.org/drawingml/2006/compatibility" xmlns:p14="http://schemas.microsoft.com/office/powerpoint/2010/main" xmlns:p15="http://schemas.microsoft.com/office/powerpoint/2012/main" xmlns:ahyp="http://schemas.microsoft.com/office/drawing/2018/hyperlinkcolor" showMasterPhAnim="0" showMasterSp="0">
+  <p:cSld>
+    <p:spTree>
+      <p:nvGrpSpPr>
+        <p:cNvPr id="172" name="Shape 172"/>
+        <p:cNvGrpSpPr/>
+        <p:nvPr/>
+      </p:nvGrpSpPr>
+      <p:grpSpPr>
+        <a:xfrm>
+          <a:off x="0" y="0"/>
+          <a:ext cx="0" cy="0"/>
+          <a:chOff x="0" y="0"/>
+          <a:chExt cx="0" cy="0"/>
+        </a:xfrm>
+      </p:grpSpPr>
+      <p:sp>
+        <p:nvSpPr>
+          <p:cNvPr id="173" name="Google Shape;173;g2b5181c9aa9_0_0:notes"/>
+          <p:cNvSpPr/>
+          <p:nvPr>
+            <p:ph idx="2" type="sldImg"/>
+          </p:nvPr>
+        </p:nvSpPr>
+        <p:spPr>
+          <a:xfrm>
+            <a:off x="381300" y="685800"/>
+            <a:ext cx="6096000" cy="3429000"/>
+          </a:xfrm>
+          <a:custGeom>
+            <a:rect b="b" l="l" r="r" t="t"/>
+            <a:pathLst>
+              <a:path extrusionOk="0" h="120000" w="120000">
+                <a:moveTo>
+                  <a:pt x="0" y="0"/>
+                </a:moveTo>
+                <a:lnTo>
+                  <a:pt x="120000" y="0"/>
+                </a:lnTo>
+                <a:lnTo>
+                  <a:pt x="120000" y="120000"/>
+                </a:lnTo>
+                <a:lnTo>
+                  <a:pt x="0" y="120000"/>
+                </a:lnTo>
+                <a:close/>
+              </a:path>
+            </a:pathLst>
+          </a:custGeom>
+        </p:spPr>
+      </p:sp>
+      <p:sp>
+        <p:nvSpPr>
+          <p:cNvPr id="174" name="Google Shape;174;g2b5181c9aa9_0_0:notes"/>
+          <p:cNvSpPr txBox="1"/>
+          <p:nvPr>
+            <p:ph idx="1" type="body"/>
+          </p:nvPr>
+        </p:nvSpPr>
+        <p:spPr>
+          <a:xfrm>
+            <a:off x="685800" y="4343400"/>
+            <a:ext cx="5486400" cy="4114800"/>
+          </a:xfrm>
+          <a:prstGeom prst="rect">
+            <a:avLst/>
+          </a:prstGeom>
+        </p:spPr>
+        <p:txBody>
+          <a:bodyPr anchorCtr="0" anchor="t" bIns="91425" lIns="91425" spcFirstLastPara="1" rIns="91425" wrap="square" tIns="91425">
+            <a:noAutofit/>
+          </a:bodyPr>
+          <a:lstStyle/>
+          <a:p>
+            <a:pPr indent="0" lvl="0" marL="0" rtl="0" algn="l">
+              <a:spcBef>
+                <a:spcPts val="0"/>
+              </a:spcBef>
+              <a:spcAft>
+                <a:spcPts val="0"/>
+              </a:spcAft>
+              <a:buNone/>
+            </a:pPr>
+            <a:r>
+              <a:t/>
+            </a:r>
+            <a:endParaRPr/>
+          </a:p>
+        </p:txBody>
+      </p:sp>
+    </p:spTree>
+  </p:cSld>
+  <p:clrMapOvr>
+    <a:masterClrMapping/>
+  </p:clrMapOvr>
+</p:notes>
+</file>
+
+<file path=ppt/notesSlides/notesSlide17.xml><?xml version="1.0" encoding="utf-8"?>
+<p:notes xmlns:a="http://schemas.openxmlformats.org/drawingml/2006/main" xmlns:r="http://schemas.openxmlformats.org/officeDocument/2006/relationships" xmlns:mc="http://schemas.openxmlformats.org/markup-compatibility/2006" xmlns:mv="urn:schemas-microsoft-com:mac:vml" xmlns:p="http://schemas.openxmlformats.org/presentationml/2006/main" xmlns:c="http://schemas.openxmlformats.org/drawingml/2006/chart" xmlns:dgm="http://schemas.openxmlformats.org/drawingml/2006/diagram" xmlns:o="urn:schemas-microsoft-com:office:office" xmlns:v="urn:schemas-microsoft-com:vml" xmlns:pvml="urn:schemas-microsoft-com:office:powerpoint" xmlns:com="http://schemas.openxmlformats.org/drawingml/2006/compatibility" xmlns:p14="http://schemas.microsoft.com/office/powerpoint/2010/main" xmlns:p15="http://schemas.microsoft.com/office/powerpoint/2012/main" xmlns:ahyp="http://schemas.microsoft.com/office/drawing/2018/hyperlinkcolor" showMasterPhAnim="0" showMasterSp="0">
+  <p:cSld>
+    <p:spTree>
+      <p:nvGrpSpPr>
+        <p:cNvPr id="180" name="Shape 180"/>
+        <p:cNvGrpSpPr/>
+        <p:nvPr/>
+      </p:nvGrpSpPr>
+      <p:grpSpPr>
+        <a:xfrm>
+          <a:off x="0" y="0"/>
+          <a:ext cx="0" cy="0"/>
+          <a:chOff x="0" y="0"/>
+          <a:chExt cx="0" cy="0"/>
+        </a:xfrm>
+      </p:grpSpPr>
+      <p:sp>
+        <p:nvSpPr>
+          <p:cNvPr id="181" name="Google Shape;181;g2b5181c9aa9_0_17:notes"/>
+          <p:cNvSpPr/>
+          <p:nvPr>
+            <p:ph idx="2" type="sldImg"/>
+          </p:nvPr>
+        </p:nvSpPr>
+        <p:spPr>
+          <a:xfrm>
+            <a:off x="381300" y="685800"/>
+            <a:ext cx="6096000" cy="3429000"/>
+          </a:xfrm>
+          <a:custGeom>
+            <a:rect b="b" l="l" r="r" t="t"/>
+            <a:pathLst>
+              <a:path extrusionOk="0" h="120000" w="120000">
+                <a:moveTo>
+                  <a:pt x="0" y="0"/>
+                </a:moveTo>
+                <a:lnTo>
+                  <a:pt x="120000" y="0"/>
+                </a:lnTo>
+                <a:lnTo>
+                  <a:pt x="120000" y="120000"/>
+                </a:lnTo>
+                <a:lnTo>
+                  <a:pt x="0" y="120000"/>
+                </a:lnTo>
+                <a:close/>
+              </a:path>
+            </a:pathLst>
+          </a:custGeom>
+        </p:spPr>
+      </p:sp>
+      <p:sp>
+        <p:nvSpPr>
+          <p:cNvPr id="182" name="Google Shape;182;g2b5181c9aa9_0_17:notes"/>
+          <p:cNvSpPr txBox="1"/>
+          <p:nvPr>
+            <p:ph idx="1" type="body"/>
+          </p:nvPr>
+        </p:nvSpPr>
+        <p:spPr>
+          <a:xfrm>
+            <a:off x="685800" y="4343400"/>
+            <a:ext cx="5486400" cy="4114800"/>
+          </a:xfrm>
+          <a:prstGeom prst="rect">
+            <a:avLst/>
+          </a:prstGeom>
+        </p:spPr>
+        <p:txBody>
+          <a:bodyPr anchorCtr="0" anchor="t" bIns="91425" lIns="91425" spcFirstLastPara="1" rIns="91425" wrap="square" tIns="91425">
+            <a:noAutofit/>
+          </a:bodyPr>
+          <a:lstStyle/>
+          <a:p>
+            <a:pPr indent="0" lvl="0" marL="0" rtl="0" algn="l">
+              <a:spcBef>
+                <a:spcPts val="0"/>
+              </a:spcBef>
+              <a:spcAft>
+                <a:spcPts val="0"/>
+              </a:spcAft>
+              <a:buNone/>
+            </a:pPr>
+            <a:r>
+              <a:t/>
+            </a:r>
+            <a:endParaRPr/>
+          </a:p>
+        </p:txBody>
+      </p:sp>
+    </p:spTree>
+  </p:cSld>
+  <p:clrMapOvr>
+    <a:masterClrMapping/>
+  </p:clrMapOvr>
+</p:notes>
+</file>
+
+<file path=ppt/notesSlides/notesSlide18.xml><?xml version="1.0" encoding="utf-8"?>
+<p:notes xmlns:a="http://schemas.openxmlformats.org/drawingml/2006/main" xmlns:r="http://schemas.openxmlformats.org/officeDocument/2006/relationships" xmlns:mc="http://schemas.openxmlformats.org/markup-compatibility/2006" xmlns:mv="urn:schemas-microsoft-com:mac:vml" xmlns:p="http://schemas.openxmlformats.org/presentationml/2006/main" xmlns:c="http://schemas.openxmlformats.org/drawingml/2006/chart" xmlns:dgm="http://schemas.openxmlformats.org/drawingml/2006/diagram" xmlns:o="urn:schemas-microsoft-com:office:office" xmlns:v="urn:schemas-microsoft-com:vml" xmlns:pvml="urn:schemas-microsoft-com:office:powerpoint" xmlns:com="http://schemas.openxmlformats.org/drawingml/2006/compatibility" xmlns:p14="http://schemas.microsoft.com/office/powerpoint/2010/main" xmlns:p15="http://schemas.microsoft.com/office/powerpoint/2012/main" xmlns:ahyp="http://schemas.microsoft.com/office/drawing/2018/hyperlinkcolor" showMasterPhAnim="0" showMasterSp="0">
+  <p:cSld>
+    <p:spTree>
+      <p:nvGrpSpPr>
+        <p:cNvPr id="186" name="Shape 186"/>
+        <p:cNvGrpSpPr/>
+        <p:nvPr/>
+      </p:nvGrpSpPr>
+      <p:grpSpPr>
+        <a:xfrm>
+          <a:off x="0" y="0"/>
+          <a:ext cx="0" cy="0"/>
+          <a:chOff x="0" y="0"/>
+          <a:chExt cx="0" cy="0"/>
+        </a:xfrm>
+      </p:grpSpPr>
+      <p:sp>
+        <p:nvSpPr>
+          <p:cNvPr id="187" name="Google Shape;187;g2b5181c9aa9_0_26:notes"/>
+          <p:cNvSpPr/>
+          <p:nvPr>
+            <p:ph idx="2" type="sldImg"/>
+          </p:nvPr>
+        </p:nvSpPr>
+        <p:spPr>
+          <a:xfrm>
+            <a:off x="381300" y="685800"/>
+            <a:ext cx="6096000" cy="3429000"/>
+          </a:xfrm>
+          <a:custGeom>
+            <a:rect b="b" l="l" r="r" t="t"/>
+            <a:pathLst>
+              <a:path extrusionOk="0" h="120000" w="120000">
+                <a:moveTo>
+                  <a:pt x="0" y="0"/>
+                </a:moveTo>
+                <a:lnTo>
+                  <a:pt x="120000" y="0"/>
+                </a:lnTo>
+                <a:lnTo>
+                  <a:pt x="120000" y="120000"/>
+                </a:lnTo>
+                <a:lnTo>
+                  <a:pt x="0" y="120000"/>
+                </a:lnTo>
+                <a:close/>
+              </a:path>
+            </a:pathLst>
+          </a:custGeom>
+        </p:spPr>
+      </p:sp>
+      <p:sp>
+        <p:nvSpPr>
+          <p:cNvPr id="188" name="Google Shape;188;g2b5181c9aa9_0_26:notes"/>
           <p:cNvSpPr txBox="1"/>
           <p:nvPr>
             <p:ph idx="1" type="body"/>
@@ -6826,16 +7326,16 @@
                 <a:cs typeface="Calibri"/>
                 <a:sym typeface="Calibri"/>
               </a:rPr>
-              <a:t>4. 5</a:t>
-            </a:r>
-            <a:r>
-              <a:rPr b="1" lang="zh-TW" sz="1550">
+              <a:t>4. </a:t>
+            </a:r>
+            <a:r>
+              <a:rPr lang="zh-TW" sz="1600">
                 <a:latin typeface="Calibri"/>
                 <a:ea typeface="Calibri"/>
                 <a:cs typeface="Calibri"/>
                 <a:sym typeface="Calibri"/>
               </a:rPr>
-              <a:t>GC example: Magma</a:t>
+              <a:t>5GC opensource 1 </a:t>
             </a:r>
             <a:r>
               <a:rPr b="1" lang="zh-TW" sz="1550">
@@ -7329,9 +7829,294 @@
           <a:chExt cx="0" cy="0"/>
         </a:xfrm>
       </p:grpSpPr>
+      <p:sp>
+        <p:nvSpPr>
+          <p:cNvPr id="138" name="Google Shape;138;p23"/>
+          <p:cNvSpPr txBox="1"/>
+          <p:nvPr>
+            <p:ph type="title"/>
+          </p:nvPr>
+        </p:nvSpPr>
+        <p:spPr>
+          <a:xfrm>
+            <a:off x="198250" y="240800"/>
+            <a:ext cx="8520600" cy="572700"/>
+          </a:xfrm>
+          <a:prstGeom prst="rect">
+            <a:avLst/>
+          </a:prstGeom>
+        </p:spPr>
+        <p:txBody>
+          <a:bodyPr anchorCtr="0" anchor="t" bIns="91425" lIns="91425" spcFirstLastPara="1" rIns="91425" wrap="square" tIns="91425">
+            <a:normAutofit fontScale="90000"/>
+          </a:bodyPr>
+          <a:lstStyle/>
+          <a:p>
+            <a:pPr indent="0" lvl="0" marL="457200" rtl="0" algn="l">
+              <a:spcBef>
+                <a:spcPts val="0"/>
+              </a:spcBef>
+              <a:spcAft>
+                <a:spcPts val="0"/>
+              </a:spcAft>
+              <a:buNone/>
+            </a:pPr>
+            <a:r>
+              <a:rPr lang="zh-TW" sz="1600">
+                <a:latin typeface="Calibri"/>
+                <a:ea typeface="Calibri"/>
+                <a:cs typeface="Calibri"/>
+                <a:sym typeface="Calibri"/>
+              </a:rPr>
+              <a:t>5. </a:t>
+            </a:r>
+            <a:r>
+              <a:rPr lang="zh-TW" sz="1600">
+                <a:latin typeface="Calibri"/>
+                <a:ea typeface="Calibri"/>
+                <a:cs typeface="Calibri"/>
+                <a:sym typeface="Calibri"/>
+              </a:rPr>
+              <a:t>5GC opensource 2 : open5gs and ueransim</a:t>
+            </a:r>
+            <a:endParaRPr/>
+          </a:p>
+        </p:txBody>
+      </p:sp>
+      <p:sp>
+        <p:nvSpPr>
+          <p:cNvPr id="139" name="Google Shape;139;p23"/>
+          <p:cNvSpPr txBox="1"/>
+          <p:nvPr/>
+        </p:nvSpPr>
+        <p:spPr>
+          <a:xfrm>
+            <a:off x="779075" y="4629000"/>
+            <a:ext cx="7231200" cy="514500"/>
+          </a:xfrm>
+          <a:prstGeom prst="rect">
+            <a:avLst/>
+          </a:prstGeom>
+          <a:noFill/>
+          <a:ln>
+            <a:noFill/>
+          </a:ln>
+        </p:spPr>
+        <p:txBody>
+          <a:bodyPr anchorCtr="0" anchor="t" bIns="91425" lIns="91425" spcFirstLastPara="1" rIns="91425" wrap="square" tIns="91425">
+            <a:noAutofit/>
+          </a:bodyPr>
+          <a:lstStyle/>
+          <a:p>
+            <a:pPr indent="0" lvl="0" marL="0" rtl="0" algn="l">
+              <a:spcBef>
+                <a:spcPts val="0"/>
+              </a:spcBef>
+              <a:spcAft>
+                <a:spcPts val="0"/>
+              </a:spcAft>
+              <a:buNone/>
+            </a:pPr>
+            <a:r>
+              <a:t/>
+            </a:r>
+            <a:endParaRPr sz="1800">
+              <a:solidFill>
+                <a:schemeClr val="dk2"/>
+              </a:solidFill>
+            </a:endParaRPr>
+          </a:p>
+        </p:txBody>
+      </p:sp>
       <p:pic>
         <p:nvPicPr>
-          <p:cNvPr id="138" name="Google Shape;138;p23"/>
+          <p:cNvPr id="140" name="Google Shape;140;p23"/>
+          <p:cNvPicPr preferRelativeResize="0"/>
+          <p:nvPr/>
+        </p:nvPicPr>
+        <p:blipFill>
+          <a:blip r:embed="rId3">
+            <a:alphaModFix/>
+          </a:blip>
+          <a:stretch>
+            <a:fillRect/>
+          </a:stretch>
+        </p:blipFill>
+        <p:spPr>
+          <a:xfrm>
+            <a:off x="455925" y="644225"/>
+            <a:ext cx="6323501" cy="4049001"/>
+          </a:xfrm>
+          <a:prstGeom prst="rect">
+            <a:avLst/>
+          </a:prstGeom>
+          <a:noFill/>
+          <a:ln>
+            <a:noFill/>
+          </a:ln>
+        </p:spPr>
+      </p:pic>
+      <p:sp>
+        <p:nvSpPr>
+          <p:cNvPr id="141" name="Google Shape;141;p23"/>
+          <p:cNvSpPr txBox="1"/>
+          <p:nvPr/>
+        </p:nvSpPr>
+        <p:spPr>
+          <a:xfrm>
+            <a:off x="1073200" y="4561050"/>
+            <a:ext cx="6323400" cy="650400"/>
+          </a:xfrm>
+          <a:prstGeom prst="rect">
+            <a:avLst/>
+          </a:prstGeom>
+          <a:noFill/>
+          <a:ln>
+            <a:noFill/>
+          </a:ln>
+        </p:spPr>
+        <p:txBody>
+          <a:bodyPr anchorCtr="0" anchor="t" bIns="91425" lIns="91425" spcFirstLastPara="1" rIns="91425" wrap="square" tIns="91425">
+            <a:noAutofit/>
+          </a:bodyPr>
+          <a:lstStyle/>
+          <a:p>
+            <a:pPr indent="0" lvl="0" marL="0" rtl="0" algn="l">
+              <a:spcBef>
+                <a:spcPts val="0"/>
+              </a:spcBef>
+              <a:spcAft>
+                <a:spcPts val="0"/>
+              </a:spcAft>
+              <a:buNone/>
+            </a:pPr>
+            <a:r>
+              <a:rPr lang="zh-TW" sz="1200" u="sng">
+                <a:solidFill>
+                  <a:schemeClr val="hlink"/>
+                </a:solidFill>
+                <a:hlinkClick r:id="rId4"/>
+              </a:rPr>
+              <a:t>https://nickvsnetworking.com/my-first-5g-core-open5gs-and-ueransim/</a:t>
+            </a:r>
+            <a:endParaRPr sz="1200">
+              <a:solidFill>
+                <a:schemeClr val="dk2"/>
+              </a:solidFill>
+            </a:endParaRPr>
+          </a:p>
+          <a:p>
+            <a:pPr indent="0" lvl="0" marL="0" rtl="0" algn="l">
+              <a:spcBef>
+                <a:spcPts val="0"/>
+              </a:spcBef>
+              <a:spcAft>
+                <a:spcPts val="0"/>
+              </a:spcAft>
+              <a:buClr>
+                <a:schemeClr val="dk1"/>
+              </a:buClr>
+              <a:buSzPts val="1100"/>
+              <a:buFont typeface="Arial"/>
+              <a:buNone/>
+            </a:pPr>
+            <a:r>
+              <a:rPr lang="zh-TW" sz="1200">
+                <a:solidFill>
+                  <a:schemeClr val="dk2"/>
+                </a:solidFill>
+              </a:rPr>
+              <a:t>https://open5gs.org/open5gs/docs/guide/01-quickstart/</a:t>
+            </a:r>
+            <a:endParaRPr sz="900">
+              <a:solidFill>
+                <a:schemeClr val="dk2"/>
+              </a:solidFill>
+            </a:endParaRPr>
+          </a:p>
+        </p:txBody>
+      </p:sp>
+    </p:spTree>
+  </p:cSld>
+  <p:clrMapOvr>
+    <a:masterClrMapping/>
+  </p:clrMapOvr>
+</p:sld>
+</file>
+
+<file path=ppt/slides/slide12.xml><?xml version="1.0" encoding="utf-8"?>
+<p:sld xmlns:a="http://schemas.openxmlformats.org/drawingml/2006/main" xmlns:r="http://schemas.openxmlformats.org/officeDocument/2006/relationships" xmlns:mc="http://schemas.openxmlformats.org/markup-compatibility/2006" xmlns:mv="urn:schemas-microsoft-com:mac:vml" xmlns:p="http://schemas.openxmlformats.org/presentationml/2006/main" xmlns:c="http://schemas.openxmlformats.org/drawingml/2006/chart" xmlns:dgm="http://schemas.openxmlformats.org/drawingml/2006/diagram" xmlns:o="urn:schemas-microsoft-com:office:office" xmlns:v="urn:schemas-microsoft-com:vml" xmlns:pvml="urn:schemas-microsoft-com:office:powerpoint" xmlns:com="http://schemas.openxmlformats.org/drawingml/2006/compatibility" xmlns:p14="http://schemas.microsoft.com/office/powerpoint/2010/main" xmlns:p15="http://schemas.microsoft.com/office/powerpoint/2012/main" xmlns:ahyp="http://schemas.microsoft.com/office/drawing/2018/hyperlinkcolor">
+  <p:cSld>
+    <p:spTree>
+      <p:nvGrpSpPr>
+        <p:cNvPr id="145" name="Shape 145"/>
+        <p:cNvGrpSpPr/>
+        <p:nvPr/>
+      </p:nvGrpSpPr>
+      <p:grpSpPr>
+        <a:xfrm>
+          <a:off x="0" y="0"/>
+          <a:ext cx="0" cy="0"/>
+          <a:chOff x="0" y="0"/>
+          <a:chExt cx="0" cy="0"/>
+        </a:xfrm>
+      </p:grpSpPr>
+      <p:pic>
+        <p:nvPicPr>
+          <p:cNvPr id="146" name="Google Shape;146;p24"/>
+          <p:cNvPicPr preferRelativeResize="0"/>
+          <p:nvPr/>
+        </p:nvPicPr>
+        <p:blipFill>
+          <a:blip r:embed="rId3">
+            <a:alphaModFix/>
+          </a:blip>
+          <a:stretch>
+            <a:fillRect/>
+          </a:stretch>
+        </p:blipFill>
+        <p:spPr>
+          <a:xfrm>
+            <a:off x="0" y="0"/>
+            <a:ext cx="9144000" cy="5143500"/>
+          </a:xfrm>
+          <a:prstGeom prst="rect">
+            <a:avLst/>
+          </a:prstGeom>
+          <a:noFill/>
+          <a:ln>
+            <a:noFill/>
+          </a:ln>
+        </p:spPr>
+      </p:pic>
+    </p:spTree>
+  </p:cSld>
+  <p:clrMapOvr>
+    <a:masterClrMapping/>
+  </p:clrMapOvr>
+</p:sld>
+</file>
+
+<file path=ppt/slides/slide13.xml><?xml version="1.0" encoding="utf-8"?>
+<p:sld xmlns:a="http://schemas.openxmlformats.org/drawingml/2006/main" xmlns:r="http://schemas.openxmlformats.org/officeDocument/2006/relationships" xmlns:mc="http://schemas.openxmlformats.org/markup-compatibility/2006" xmlns:mv="urn:schemas-microsoft-com:mac:vml" xmlns:p="http://schemas.openxmlformats.org/presentationml/2006/main" xmlns:c="http://schemas.openxmlformats.org/drawingml/2006/chart" xmlns:dgm="http://schemas.openxmlformats.org/drawingml/2006/diagram" xmlns:o="urn:schemas-microsoft-com:office:office" xmlns:v="urn:schemas-microsoft-com:vml" xmlns:pvml="urn:schemas-microsoft-com:office:powerpoint" xmlns:com="http://schemas.openxmlformats.org/drawingml/2006/compatibility" xmlns:p14="http://schemas.microsoft.com/office/powerpoint/2010/main" xmlns:p15="http://schemas.microsoft.com/office/powerpoint/2012/main" xmlns:ahyp="http://schemas.microsoft.com/office/drawing/2018/hyperlinkcolor">
+  <p:cSld>
+    <p:spTree>
+      <p:nvGrpSpPr>
+        <p:cNvPr id="150" name="Shape 150"/>
+        <p:cNvGrpSpPr/>
+        <p:nvPr/>
+      </p:nvGrpSpPr>
+      <p:grpSpPr>
+        <a:xfrm>
+          <a:off x="0" y="0"/>
+          <a:ext cx="0" cy="0"/>
+          <a:chOff x="0" y="0"/>
+          <a:chExt cx="0" cy="0"/>
+        </a:xfrm>
+      </p:grpSpPr>
+      <p:pic>
+        <p:nvPicPr>
+          <p:cNvPr id="151" name="Google Shape;151;p25"/>
           <p:cNvPicPr preferRelativeResize="0"/>
           <p:nvPr/>
         </p:nvPicPr>
@@ -7359,7 +8144,7 @@
       </p:pic>
       <p:sp>
         <p:nvSpPr>
-          <p:cNvPr id="139" name="Google Shape;139;p23"/>
+          <p:cNvPr id="152" name="Google Shape;152;p25"/>
           <p:cNvSpPr txBox="1"/>
           <p:nvPr/>
         </p:nvSpPr>
@@ -7409,7 +8194,7 @@
       </p:sp>
       <p:sp>
         <p:nvSpPr>
-          <p:cNvPr id="140" name="Google Shape;140;p23"/>
+          <p:cNvPr id="153" name="Google Shape;153;p25"/>
           <p:cNvSpPr txBox="1"/>
           <p:nvPr/>
         </p:nvSpPr>
@@ -7451,7 +8236,7 @@
       </p:sp>
       <p:sp>
         <p:nvSpPr>
-          <p:cNvPr id="141" name="Google Shape;141;p23"/>
+          <p:cNvPr id="154" name="Google Shape;154;p25"/>
           <p:cNvSpPr txBox="1"/>
           <p:nvPr/>
         </p:nvSpPr>
@@ -7493,7 +8278,7 @@
       </p:sp>
       <p:sp>
         <p:nvSpPr>
-          <p:cNvPr id="142" name="Google Shape;142;p23"/>
+          <p:cNvPr id="155" name="Google Shape;155;p25"/>
           <p:cNvSpPr txBox="1"/>
           <p:nvPr/>
         </p:nvSpPr>
@@ -7535,7 +8320,7 @@
       </p:sp>
       <p:sp>
         <p:nvSpPr>
-          <p:cNvPr id="143" name="Google Shape;143;p23"/>
+          <p:cNvPr id="156" name="Google Shape;156;p25"/>
           <p:cNvSpPr txBox="1"/>
           <p:nvPr>
             <p:ph idx="4294967295" type="subTitle"/>
@@ -7567,7 +8352,7 @@
             </a:pPr>
             <a:r>
               <a:rPr b="1" lang="zh-TW"/>
-              <a:t>5.Test Beds </a:t>
+              <a:t>.Test Beds </a:t>
             </a:r>
             <a:r>
               <a:rPr b="1" lang="zh-TW"/>
@@ -7593,12 +8378,12 @@
 </p:sld>
 </file>
 
-<file path=ppt/slides/slide12.xml><?xml version="1.0" encoding="utf-8"?>
+<file path=ppt/slides/slide14.xml><?xml version="1.0" encoding="utf-8"?>
 <p:sld xmlns:a="http://schemas.openxmlformats.org/drawingml/2006/main" xmlns:r="http://schemas.openxmlformats.org/officeDocument/2006/relationships" xmlns:mc="http://schemas.openxmlformats.org/markup-compatibility/2006" xmlns:mv="urn:schemas-microsoft-com:mac:vml" xmlns:p="http://schemas.openxmlformats.org/presentationml/2006/main" xmlns:c="http://schemas.openxmlformats.org/drawingml/2006/chart" xmlns:dgm="http://schemas.openxmlformats.org/drawingml/2006/diagram" xmlns:o="urn:schemas-microsoft-com:office:office" xmlns:v="urn:schemas-microsoft-com:vml" xmlns:pvml="urn:schemas-microsoft-com:office:powerpoint" xmlns:com="http://schemas.openxmlformats.org/drawingml/2006/compatibility" xmlns:p14="http://schemas.microsoft.com/office/powerpoint/2010/main" xmlns:p15="http://schemas.microsoft.com/office/powerpoint/2012/main" xmlns:ahyp="http://schemas.microsoft.com/office/drawing/2018/hyperlinkcolor">
   <p:cSld>
     <p:spTree>
       <p:nvGrpSpPr>
-        <p:cNvPr id="147" name="Shape 147"/>
+        <p:cNvPr id="160" name="Shape 160"/>
         <p:cNvGrpSpPr/>
         <p:nvPr/>
       </p:nvGrpSpPr>
@@ -7612,7 +8397,7 @@
       </p:grpSpPr>
       <p:sp>
         <p:nvSpPr>
-          <p:cNvPr id="148" name="Google Shape;148;p24"/>
+          <p:cNvPr id="161" name="Google Shape;161;p26"/>
           <p:cNvSpPr txBox="1"/>
           <p:nvPr/>
         </p:nvSpPr>
@@ -7657,7 +8442,7 @@
                 <a:cs typeface="Calibri"/>
                 <a:sym typeface="Calibri"/>
               </a:rPr>
-              <a:t>6. </a:t>
+              <a:t>. </a:t>
             </a:r>
             <a:r>
               <a:rPr b="1" lang="zh-TW">
@@ -7704,7 +8489,7 @@
       </p:sp>
       <p:pic>
         <p:nvPicPr>
-          <p:cNvPr id="149" name="Google Shape;149;p24"/>
+          <p:cNvPr id="162" name="Google Shape;162;p26"/>
           <p:cNvPicPr preferRelativeResize="0"/>
           <p:nvPr/>
         </p:nvPicPr>
@@ -7732,7 +8517,7 @@
       </p:pic>
       <p:sp>
         <p:nvSpPr>
-          <p:cNvPr id="150" name="Google Shape;150;p24"/>
+          <p:cNvPr id="163" name="Google Shape;163;p26"/>
           <p:cNvSpPr txBox="1"/>
           <p:nvPr/>
         </p:nvSpPr>
@@ -7782,7 +8567,7 @@
       </p:sp>
       <p:sp>
         <p:nvSpPr>
-          <p:cNvPr id="151" name="Google Shape;151;p24"/>
+          <p:cNvPr id="164" name="Google Shape;164;p26"/>
           <p:cNvSpPr txBox="1"/>
           <p:nvPr/>
         </p:nvSpPr>
@@ -7838,12 +8623,12 @@
 </p:sld>
 </file>
 
-<file path=ppt/slides/slide13.xml><?xml version="1.0" encoding="utf-8"?>
+<file path=ppt/slides/slide15.xml><?xml version="1.0" encoding="utf-8"?>
 <p:sld xmlns:a="http://schemas.openxmlformats.org/drawingml/2006/main" xmlns:r="http://schemas.openxmlformats.org/officeDocument/2006/relationships" xmlns:mc="http://schemas.openxmlformats.org/markup-compatibility/2006" xmlns:mv="urn:schemas-microsoft-com:mac:vml" xmlns:p="http://schemas.openxmlformats.org/presentationml/2006/main" xmlns:c="http://schemas.openxmlformats.org/drawingml/2006/chart" xmlns:dgm="http://schemas.openxmlformats.org/drawingml/2006/diagram" xmlns:o="urn:schemas-microsoft-com:office:office" xmlns:v="urn:schemas-microsoft-com:vml" xmlns:pvml="urn:schemas-microsoft-com:office:powerpoint" xmlns:com="http://schemas.openxmlformats.org/drawingml/2006/compatibility" xmlns:p14="http://schemas.microsoft.com/office/powerpoint/2010/main" xmlns:p15="http://schemas.microsoft.com/office/powerpoint/2012/main" xmlns:ahyp="http://schemas.microsoft.com/office/drawing/2018/hyperlinkcolor">
   <p:cSld>
     <p:spTree>
       <p:nvGrpSpPr>
-        <p:cNvPr id="155" name="Shape 155"/>
+        <p:cNvPr id="168" name="Shape 168"/>
         <p:cNvGrpSpPr/>
         <p:nvPr/>
       </p:nvGrpSpPr>
@@ -7857,7 +8642,7 @@
       </p:grpSpPr>
       <p:sp>
         <p:nvSpPr>
-          <p:cNvPr id="156" name="Google Shape;156;p25"/>
+          <p:cNvPr id="169" name="Google Shape;169;p27"/>
           <p:cNvSpPr txBox="1"/>
           <p:nvPr/>
         </p:nvSpPr>
@@ -7902,7 +8687,7 @@
                 <a:cs typeface="Calibri"/>
                 <a:sym typeface="Calibri"/>
               </a:rPr>
-              <a:t>7. </a:t>
+              <a:t>8. </a:t>
             </a:r>
             <a:r>
               <a:rPr lang="zh-TW">
@@ -7926,7 +8711,7 @@
       </p:sp>
       <p:pic>
         <p:nvPicPr>
-          <p:cNvPr id="157" name="Google Shape;157;p25"/>
+          <p:cNvPr id="170" name="Google Shape;170;p27"/>
           <p:cNvPicPr preferRelativeResize="0"/>
           <p:nvPr/>
         </p:nvPicPr>
@@ -7954,7 +8739,7 @@
       </p:pic>
       <p:sp>
         <p:nvSpPr>
-          <p:cNvPr id="158" name="Google Shape;158;p25"/>
+          <p:cNvPr id="171" name="Google Shape;171;p27"/>
           <p:cNvSpPr txBox="1"/>
           <p:nvPr/>
         </p:nvSpPr>
@@ -7994,6 +8779,2317 @@
           </a:p>
         </p:txBody>
       </p:sp>
+    </p:spTree>
+  </p:cSld>
+  <p:clrMapOvr>
+    <a:masterClrMapping/>
+  </p:clrMapOvr>
+</p:sld>
+</file>
+
+<file path=ppt/slides/slide16.xml><?xml version="1.0" encoding="utf-8"?>
+<p:sld xmlns:a="http://schemas.openxmlformats.org/drawingml/2006/main" xmlns:r="http://schemas.openxmlformats.org/officeDocument/2006/relationships" xmlns:mc="http://schemas.openxmlformats.org/markup-compatibility/2006" xmlns:mv="urn:schemas-microsoft-com:mac:vml" xmlns:p="http://schemas.openxmlformats.org/presentationml/2006/main" xmlns:c="http://schemas.openxmlformats.org/drawingml/2006/chart" xmlns:dgm="http://schemas.openxmlformats.org/drawingml/2006/diagram" xmlns:o="urn:schemas-microsoft-com:office:office" xmlns:v="urn:schemas-microsoft-com:vml" xmlns:pvml="urn:schemas-microsoft-com:office:powerpoint" xmlns:com="http://schemas.openxmlformats.org/drawingml/2006/compatibility" xmlns:p14="http://schemas.microsoft.com/office/powerpoint/2010/main" xmlns:p15="http://schemas.microsoft.com/office/powerpoint/2012/main" xmlns:ahyp="http://schemas.microsoft.com/office/drawing/2018/hyperlinkcolor">
+  <p:cSld>
+    <p:spTree>
+      <p:nvGrpSpPr>
+        <p:cNvPr id="175" name="Shape 175"/>
+        <p:cNvGrpSpPr/>
+        <p:nvPr/>
+      </p:nvGrpSpPr>
+      <p:grpSpPr>
+        <a:xfrm>
+          <a:off x="0" y="0"/>
+          <a:ext cx="0" cy="0"/>
+          <a:chOff x="0" y="0"/>
+          <a:chExt cx="0" cy="0"/>
+        </a:xfrm>
+      </p:grpSpPr>
+      <p:sp>
+        <p:nvSpPr>
+          <p:cNvPr id="176" name="Google Shape;176;p28"/>
+          <p:cNvSpPr txBox="1"/>
+          <p:nvPr>
+            <p:ph type="title"/>
+          </p:nvPr>
+        </p:nvSpPr>
+        <p:spPr>
+          <a:xfrm>
+            <a:off x="311700" y="445025"/>
+            <a:ext cx="8520600" cy="572700"/>
+          </a:xfrm>
+          <a:prstGeom prst="rect">
+            <a:avLst/>
+          </a:prstGeom>
+        </p:spPr>
+        <p:txBody>
+          <a:bodyPr anchorCtr="0" anchor="t" bIns="91425" lIns="91425" spcFirstLastPara="1" rIns="91425" wrap="square" tIns="91425">
+            <a:normAutofit/>
+          </a:bodyPr>
+          <a:lstStyle/>
+          <a:p>
+            <a:pPr indent="0" lvl="0" marL="0" rtl="0" algn="l">
+              <a:spcBef>
+                <a:spcPts val="0"/>
+              </a:spcBef>
+              <a:spcAft>
+                <a:spcPts val="0"/>
+              </a:spcAft>
+              <a:buNone/>
+            </a:pPr>
+            <a:r>
+              <a:rPr lang="zh-TW" sz="1800"/>
+              <a:t>10.</a:t>
+            </a:r>
+            <a:r>
+              <a:rPr lang="zh-TW" sz="1800">
+                <a:latin typeface="Calibri"/>
+                <a:ea typeface="Calibri"/>
+                <a:cs typeface="Calibri"/>
+                <a:sym typeface="Calibri"/>
+              </a:rPr>
+              <a:t> Layer </a:t>
+            </a:r>
+            <a:r>
+              <a:rPr lang="zh-TW" sz="1800">
+                <a:latin typeface="Calibri"/>
+                <a:ea typeface="Calibri"/>
+                <a:cs typeface="Calibri"/>
+                <a:sym typeface="Calibri"/>
+              </a:rPr>
+              <a:t>2 Qos 802.1p (DSCP) test reference</a:t>
+            </a:r>
+            <a:endParaRPr sz="1800"/>
+          </a:p>
+        </p:txBody>
+      </p:sp>
+      <p:sp>
+        <p:nvSpPr>
+          <p:cNvPr id="177" name="Google Shape;177;p28"/>
+          <p:cNvSpPr txBox="1"/>
+          <p:nvPr/>
+        </p:nvSpPr>
+        <p:spPr>
+          <a:xfrm>
+            <a:off x="535350" y="3895500"/>
+            <a:ext cx="8073300" cy="1054800"/>
+          </a:xfrm>
+          <a:prstGeom prst="rect">
+            <a:avLst/>
+          </a:prstGeom>
+          <a:noFill/>
+          <a:ln>
+            <a:noFill/>
+          </a:ln>
+        </p:spPr>
+        <p:txBody>
+          <a:bodyPr anchorCtr="0" anchor="t" bIns="91425" lIns="91425" spcFirstLastPara="1" rIns="91425" wrap="square" tIns="91425">
+            <a:noAutofit/>
+          </a:bodyPr>
+          <a:lstStyle/>
+          <a:p>
+            <a:pPr indent="0" lvl="0" marL="0" rtl="0" algn="l">
+              <a:spcBef>
+                <a:spcPts val="0"/>
+              </a:spcBef>
+              <a:spcAft>
+                <a:spcPts val="0"/>
+              </a:spcAft>
+              <a:buNone/>
+            </a:pPr>
+            <a:r>
+              <a:rPr lang="zh-TW" sz="1800">
+                <a:solidFill>
+                  <a:schemeClr val="dk2"/>
+                </a:solidFill>
+              </a:rPr>
+              <a:t>https://techlibrary.hpe.com/device_help/ProCurveJ9562A/conf/qualityofservice/qosdiffserve.htm</a:t>
+            </a:r>
+            <a:endParaRPr sz="1800">
+              <a:solidFill>
+                <a:schemeClr val="dk2"/>
+              </a:solidFill>
+            </a:endParaRPr>
+          </a:p>
+        </p:txBody>
+      </p:sp>
+      <p:sp>
+        <p:nvSpPr>
+          <p:cNvPr id="178" name="Google Shape;178;p28"/>
+          <p:cNvSpPr txBox="1"/>
+          <p:nvPr/>
+        </p:nvSpPr>
+        <p:spPr>
+          <a:xfrm>
+            <a:off x="535350" y="2767075"/>
+            <a:ext cx="8520600" cy="1588500"/>
+          </a:xfrm>
+          <a:prstGeom prst="rect">
+            <a:avLst/>
+          </a:prstGeom>
+          <a:noFill/>
+          <a:ln>
+            <a:noFill/>
+          </a:ln>
+        </p:spPr>
+        <p:txBody>
+          <a:bodyPr anchorCtr="0" anchor="t" bIns="91425" lIns="91425" spcFirstLastPara="1" rIns="91425" wrap="square" tIns="91425">
+            <a:noAutofit/>
+          </a:bodyPr>
+          <a:lstStyle/>
+          <a:p>
+            <a:pPr indent="0" lvl="0" marL="0" rtl="0" algn="l">
+              <a:spcBef>
+                <a:spcPts val="0"/>
+              </a:spcBef>
+              <a:spcAft>
+                <a:spcPts val="0"/>
+              </a:spcAft>
+              <a:buNone/>
+            </a:pPr>
+            <a:r>
+              <a:rPr lang="zh-TW" sz="1800">
+                <a:solidFill>
+                  <a:schemeClr val="dk2"/>
+                </a:solidFill>
+              </a:rPr>
+              <a:t>How to Test ?  example: IXIA</a:t>
+            </a:r>
+            <a:endParaRPr sz="1800">
+              <a:solidFill>
+                <a:schemeClr val="dk2"/>
+              </a:solidFill>
+            </a:endParaRPr>
+          </a:p>
+          <a:p>
+            <a:pPr indent="0" lvl="0" marL="0" rtl="0" algn="l">
+              <a:spcBef>
+                <a:spcPts val="0"/>
+              </a:spcBef>
+              <a:spcAft>
+                <a:spcPts val="0"/>
+              </a:spcAft>
+              <a:buNone/>
+            </a:pPr>
+            <a:r>
+              <a:rPr lang="zh-TW" sz="1800">
+                <a:solidFill>
+                  <a:schemeClr val="dk2"/>
+                </a:solidFill>
+              </a:rPr>
+              <a:t>https://www.youtube.com/watch?v=ogqUlxsafUA</a:t>
+            </a:r>
+            <a:endParaRPr sz="1800">
+              <a:solidFill>
+                <a:schemeClr val="dk2"/>
+              </a:solidFill>
+            </a:endParaRPr>
+          </a:p>
+        </p:txBody>
+      </p:sp>
+      <p:sp>
+        <p:nvSpPr>
+          <p:cNvPr id="179" name="Google Shape;179;p28"/>
+          <p:cNvSpPr txBox="1"/>
+          <p:nvPr/>
+        </p:nvSpPr>
+        <p:spPr>
+          <a:xfrm>
+            <a:off x="468775" y="1017725"/>
+            <a:ext cx="8587200" cy="1354200"/>
+          </a:xfrm>
+          <a:prstGeom prst="rect">
+            <a:avLst/>
+          </a:prstGeom>
+          <a:noFill/>
+          <a:ln>
+            <a:noFill/>
+          </a:ln>
+        </p:spPr>
+        <p:txBody>
+          <a:bodyPr anchorCtr="0" anchor="t" bIns="91425" lIns="91425" spcFirstLastPara="1" rIns="91425" wrap="square" tIns="91425">
+            <a:noAutofit/>
+          </a:bodyPr>
+          <a:lstStyle/>
+          <a:p>
+            <a:pPr indent="0" lvl="0" marL="0" rtl="0" algn="l">
+              <a:spcBef>
+                <a:spcPts val="0"/>
+              </a:spcBef>
+              <a:spcAft>
+                <a:spcPts val="0"/>
+              </a:spcAft>
+              <a:buNone/>
+            </a:pPr>
+            <a:r>
+              <a:rPr lang="zh-TW" sz="1800">
+                <a:solidFill>
+                  <a:schemeClr val="dk2"/>
+                </a:solidFill>
+              </a:rPr>
+              <a:t>Keyword : Vlan user priority</a:t>
+            </a:r>
+            <a:br>
+              <a:rPr lang="zh-TW" sz="1800">
+                <a:solidFill>
+                  <a:schemeClr val="dk2"/>
+                </a:solidFill>
+              </a:rPr>
+            </a:br>
+            <a:br>
+              <a:rPr lang="zh-TW" sz="1800">
+                <a:solidFill>
+                  <a:schemeClr val="dk2"/>
+                </a:solidFill>
+              </a:rPr>
+            </a:br>
+            <a:r>
+              <a:rPr lang="zh-TW" sz="1800">
+                <a:solidFill>
+                  <a:schemeClr val="dk2"/>
+                </a:solidFill>
+              </a:rPr>
+              <a:t>Purpose: </a:t>
+            </a:r>
+            <a:r>
+              <a:rPr lang="zh-TW" sz="1800">
+                <a:solidFill>
+                  <a:schemeClr val="dk1"/>
+                </a:solidFill>
+                <a:highlight>
+                  <a:srgbClr val="FFFFFF"/>
+                </a:highlight>
+                <a:latin typeface="Verdana"/>
+                <a:ea typeface="Verdana"/>
+                <a:cs typeface="Verdana"/>
+                <a:sym typeface="Verdana"/>
+              </a:rPr>
+              <a:t>The QoS VLAN Priority lets you assign a priority to outbound packets containing the specified VLAN-ID (VID). </a:t>
+            </a:r>
+            <a:endParaRPr sz="1800">
+              <a:solidFill>
+                <a:schemeClr val="dk2"/>
+              </a:solidFill>
+            </a:endParaRPr>
+          </a:p>
+        </p:txBody>
+      </p:sp>
+    </p:spTree>
+  </p:cSld>
+  <p:clrMapOvr>
+    <a:masterClrMapping/>
+  </p:clrMapOvr>
+</p:sld>
+</file>
+
+<file path=ppt/slides/slide17.xml><?xml version="1.0" encoding="utf-8"?>
+<p:sld xmlns:a="http://schemas.openxmlformats.org/drawingml/2006/main" xmlns:r="http://schemas.openxmlformats.org/officeDocument/2006/relationships" xmlns:mc="http://schemas.openxmlformats.org/markup-compatibility/2006" xmlns:mv="urn:schemas-microsoft-com:mac:vml" xmlns:p="http://schemas.openxmlformats.org/presentationml/2006/main" xmlns:c="http://schemas.openxmlformats.org/drawingml/2006/chart" xmlns:dgm="http://schemas.openxmlformats.org/drawingml/2006/diagram" xmlns:o="urn:schemas-microsoft-com:office:office" xmlns:v="urn:schemas-microsoft-com:vml" xmlns:pvml="urn:schemas-microsoft-com:office:powerpoint" xmlns:com="http://schemas.openxmlformats.org/drawingml/2006/compatibility" xmlns:p14="http://schemas.microsoft.com/office/powerpoint/2010/main" xmlns:p15="http://schemas.microsoft.com/office/powerpoint/2012/main" xmlns:ahyp="http://schemas.microsoft.com/office/drawing/2018/hyperlinkcolor">
+  <p:cSld>
+    <p:spTree>
+      <p:nvGrpSpPr>
+        <p:cNvPr id="183" name="Shape 183"/>
+        <p:cNvGrpSpPr/>
+        <p:nvPr/>
+      </p:nvGrpSpPr>
+      <p:grpSpPr>
+        <a:xfrm>
+          <a:off x="0" y="0"/>
+          <a:ext cx="0" cy="0"/>
+          <a:chOff x="0" y="0"/>
+          <a:chExt cx="0" cy="0"/>
+        </a:xfrm>
+      </p:grpSpPr>
+      <p:graphicFrame>
+        <p:nvGraphicFramePr>
+          <p:cNvPr id="184" name="Google Shape;184;p29"/>
+          <p:cNvGraphicFramePr/>
+          <p:nvPr/>
+        </p:nvGraphicFramePr>
+        <p:xfrm>
+          <a:off x="152400" y="256575"/>
+          <a:ext cx="3000000" cy="3000000"/>
+        </p:xfrm>
+        <a:graphic>
+          <a:graphicData uri="http://schemas.openxmlformats.org/drawingml/2006/table">
+            <a:tbl>
+              <a:tblPr>
+                <a:solidFill>
+                  <a:srgbClr val="FFFFFF"/>
+                </a:solidFill>
+                <a:tableStyleId>{7954D8AB-933D-4E24-B8B1-0191E5202394}</a:tableStyleId>
+              </a:tblPr>
+              <a:tblGrid>
+                <a:gridCol w="3971925"/>
+                <a:gridCol w="1781175"/>
+                <a:gridCol w="2047875"/>
+              </a:tblGrid>
+              <a:tr h="332875">
+                <a:tc>
+                  <a:txBody>
+                    <a:bodyPr/>
+                    <a:lstStyle/>
+                    <a:p>
+                      <a:pPr indent="0" lvl="0" marL="0" rtl="0" algn="l">
+                        <a:lnSpc>
+                          <a:spcPct val="115000"/>
+                        </a:lnSpc>
+                        <a:spcBef>
+                          <a:spcPts val="0"/>
+                        </a:spcBef>
+                        <a:spcAft>
+                          <a:spcPts val="0"/>
+                        </a:spcAft>
+                        <a:buNone/>
+                      </a:pPr>
+                      <a:r>
+                        <a:rPr b="1" lang="zh-TW" sz="1200">
+                          <a:solidFill>
+                            <a:srgbClr val="161616"/>
+                          </a:solidFill>
+                          <a:highlight>
+                            <a:srgbClr val="FFFFFF"/>
+                          </a:highlight>
+                        </a:rPr>
+                        <a:t>TOS Value</a:t>
+                      </a:r>
+                      <a:endParaRPr b="1" sz="1200">
+                        <a:solidFill>
+                          <a:srgbClr val="161616"/>
+                        </a:solidFill>
+                        <a:highlight>
+                          <a:srgbClr val="FFFFFF"/>
+                        </a:highlight>
+                      </a:endParaRPr>
+                    </a:p>
+                  </a:txBody>
+                  <a:tcPr marT="91425" marB="91425" marR="91425" marL="91425" anchor="ctr">
+                    <a:lnB cap="flat" cmpd="sng" w="9525">
+                      <a:solidFill>
+                        <a:srgbClr val="F4F4F4"/>
+                      </a:solidFill>
+                      <a:prstDash val="solid"/>
+                      <a:round/>
+                      <a:headEnd len="sm" w="sm" type="none"/>
+                      <a:tailEnd len="sm" w="sm" type="none"/>
+                    </a:lnB>
+                  </a:tcPr>
+                </a:tc>
+                <a:tc>
+                  <a:txBody>
+                    <a:bodyPr/>
+                    <a:lstStyle/>
+                    <a:p>
+                      <a:pPr indent="0" lvl="0" marL="0" rtl="0" algn="l">
+                        <a:lnSpc>
+                          <a:spcPct val="115000"/>
+                        </a:lnSpc>
+                        <a:spcBef>
+                          <a:spcPts val="0"/>
+                        </a:spcBef>
+                        <a:spcAft>
+                          <a:spcPts val="0"/>
+                        </a:spcAft>
+                        <a:buNone/>
+                      </a:pPr>
+                      <a:r>
+                        <a:rPr b="1" lang="zh-TW" sz="1200">
+                          <a:solidFill>
+                            <a:srgbClr val="161616"/>
+                          </a:solidFill>
+                          <a:highlight>
+                            <a:srgbClr val="FFFFFF"/>
+                          </a:highlight>
+                        </a:rPr>
+                        <a:t>VLAN Priority</a:t>
+                      </a:r>
+                      <a:endParaRPr b="1" sz="1200">
+                        <a:solidFill>
+                          <a:srgbClr val="161616"/>
+                        </a:solidFill>
+                        <a:highlight>
+                          <a:srgbClr val="FFFFFF"/>
+                        </a:highlight>
+                      </a:endParaRPr>
+                    </a:p>
+                  </a:txBody>
+                  <a:tcPr marT="91425" marB="91425" marR="91425" marL="91425" anchor="ctr">
+                    <a:lnB cap="flat" cmpd="sng" w="9525">
+                      <a:solidFill>
+                        <a:srgbClr val="F4F4F4"/>
+                      </a:solidFill>
+                      <a:prstDash val="solid"/>
+                      <a:round/>
+                      <a:headEnd len="sm" w="sm" type="none"/>
+                      <a:tailEnd len="sm" w="sm" type="none"/>
+                    </a:lnB>
+                  </a:tcPr>
+                </a:tc>
+                <a:tc>
+                  <a:txBody>
+                    <a:bodyPr/>
+                    <a:lstStyle/>
+                    <a:p>
+                      <a:pPr indent="0" lvl="0" marL="0" rtl="0" algn="l">
+                        <a:lnSpc>
+                          <a:spcPct val="115000"/>
+                        </a:lnSpc>
+                        <a:spcBef>
+                          <a:spcPts val="0"/>
+                        </a:spcBef>
+                        <a:spcAft>
+                          <a:spcPts val="0"/>
+                        </a:spcAft>
+                        <a:buNone/>
+                      </a:pPr>
+                      <a:r>
+                        <a:rPr b="1" lang="zh-TW" sz="1200">
+                          <a:solidFill>
+                            <a:srgbClr val="161616"/>
+                          </a:solidFill>
+                          <a:highlight>
+                            <a:srgbClr val="FFFFFF"/>
+                          </a:highlight>
+                        </a:rPr>
+                        <a:t>Device Priority</a:t>
+                      </a:r>
+                      <a:endParaRPr b="1" sz="1200">
+                        <a:solidFill>
+                          <a:srgbClr val="161616"/>
+                        </a:solidFill>
+                        <a:highlight>
+                          <a:srgbClr val="FFFFFF"/>
+                        </a:highlight>
+                      </a:endParaRPr>
+                    </a:p>
+                  </a:txBody>
+                  <a:tcPr marT="91425" marB="91425" marR="91425" marL="91425" anchor="ctr">
+                    <a:lnB cap="flat" cmpd="sng" w="9525">
+                      <a:solidFill>
+                        <a:srgbClr val="F4F4F4"/>
+                      </a:solidFill>
+                      <a:prstDash val="solid"/>
+                      <a:round/>
+                      <a:headEnd len="sm" w="sm" type="none"/>
+                      <a:tailEnd len="sm" w="sm" type="none"/>
+                    </a:lnB>
+                  </a:tcPr>
+                </a:tc>
+              </a:tr>
+              <a:tr h="387850">
+                <a:tc>
+                  <a:txBody>
+                    <a:bodyPr/>
+                    <a:lstStyle/>
+                    <a:p>
+                      <a:pPr indent="0" lvl="0" marL="0" rtl="0" algn="l">
+                        <a:lnSpc>
+                          <a:spcPct val="115000"/>
+                        </a:lnSpc>
+                        <a:spcBef>
+                          <a:spcPts val="0"/>
+                        </a:spcBef>
+                        <a:spcAft>
+                          <a:spcPts val="0"/>
+                        </a:spcAft>
+                        <a:buNone/>
+                      </a:pPr>
+                      <a:r>
+                        <a:rPr lang="zh-TW" sz="1200">
+                          <a:solidFill>
+                            <a:srgbClr val="525252"/>
+                          </a:solidFill>
+                          <a:highlight>
+                            <a:srgbClr val="FFFFFF"/>
+                          </a:highlight>
+                        </a:rPr>
+                        <a:t>111000 - Network_Control</a:t>
+                      </a:r>
+                      <a:endParaRPr sz="1200">
+                        <a:solidFill>
+                          <a:srgbClr val="525252"/>
+                        </a:solidFill>
+                        <a:highlight>
+                          <a:srgbClr val="FFFFFF"/>
+                        </a:highlight>
+                      </a:endParaRPr>
+                    </a:p>
+                  </a:txBody>
+                  <a:tcPr marT="91425" marB="91425" marR="91425" marL="91425" anchor="ctr">
+                    <a:lnT cap="flat" cmpd="sng" w="9525">
+                      <a:solidFill>
+                        <a:srgbClr val="F4F4F4"/>
+                      </a:solidFill>
+                      <a:prstDash val="solid"/>
+                      <a:round/>
+                      <a:headEnd len="sm" w="sm" type="none"/>
+                      <a:tailEnd len="sm" w="sm" type="none"/>
+                    </a:lnT>
+                    <a:lnB cap="flat" cmpd="sng" w="9525">
+                      <a:solidFill>
+                        <a:srgbClr val="E0E0E0"/>
+                      </a:solidFill>
+                      <a:prstDash val="solid"/>
+                      <a:round/>
+                      <a:headEnd len="sm" w="sm" type="none"/>
+                      <a:tailEnd len="sm" w="sm" type="none"/>
+                    </a:lnB>
+                  </a:tcPr>
+                </a:tc>
+                <a:tc>
+                  <a:txBody>
+                    <a:bodyPr/>
+                    <a:lstStyle/>
+                    <a:p>
+                      <a:pPr indent="0" lvl="0" marL="0" rtl="0" algn="l">
+                        <a:lnSpc>
+                          <a:spcPct val="115000"/>
+                        </a:lnSpc>
+                        <a:spcBef>
+                          <a:spcPts val="0"/>
+                        </a:spcBef>
+                        <a:spcAft>
+                          <a:spcPts val="0"/>
+                        </a:spcAft>
+                        <a:buNone/>
+                      </a:pPr>
+                      <a:r>
+                        <a:rPr lang="zh-TW" sz="1200">
+                          <a:solidFill>
+                            <a:srgbClr val="525252"/>
+                          </a:solidFill>
+                          <a:highlight>
+                            <a:srgbClr val="FFFFFF"/>
+                          </a:highlight>
+                        </a:rPr>
+                        <a:t>7</a:t>
+                      </a:r>
+                      <a:endParaRPr sz="1200">
+                        <a:solidFill>
+                          <a:srgbClr val="525252"/>
+                        </a:solidFill>
+                        <a:highlight>
+                          <a:srgbClr val="FFFFFF"/>
+                        </a:highlight>
+                      </a:endParaRPr>
+                    </a:p>
+                  </a:txBody>
+                  <a:tcPr marT="91425" marB="91425" marR="91425" marL="91425" anchor="ctr">
+                    <a:lnT cap="flat" cmpd="sng" w="9525">
+                      <a:solidFill>
+                        <a:srgbClr val="F4F4F4"/>
+                      </a:solidFill>
+                      <a:prstDash val="solid"/>
+                      <a:round/>
+                      <a:headEnd len="sm" w="sm" type="none"/>
+                      <a:tailEnd len="sm" w="sm" type="none"/>
+                    </a:lnT>
+                    <a:lnB cap="flat" cmpd="sng" w="9525">
+                      <a:solidFill>
+                        <a:srgbClr val="E0E0E0"/>
+                      </a:solidFill>
+                      <a:prstDash val="solid"/>
+                      <a:round/>
+                      <a:headEnd len="sm" w="sm" type="none"/>
+                      <a:tailEnd len="sm" w="sm" type="none"/>
+                    </a:lnB>
+                  </a:tcPr>
+                </a:tc>
+                <a:tc>
+                  <a:txBody>
+                    <a:bodyPr/>
+                    <a:lstStyle/>
+                    <a:p>
+                      <a:pPr indent="0" lvl="0" marL="0" rtl="0" algn="l">
+                        <a:lnSpc>
+                          <a:spcPct val="115000"/>
+                        </a:lnSpc>
+                        <a:spcBef>
+                          <a:spcPts val="0"/>
+                        </a:spcBef>
+                        <a:spcAft>
+                          <a:spcPts val="0"/>
+                        </a:spcAft>
+                        <a:buNone/>
+                      </a:pPr>
+                      <a:r>
+                        <a:rPr lang="zh-TW" sz="1200">
+                          <a:solidFill>
+                            <a:srgbClr val="525252"/>
+                          </a:solidFill>
+                          <a:highlight>
+                            <a:srgbClr val="FFFFFF"/>
+                          </a:highlight>
+                        </a:rPr>
+                        <a:t>1</a:t>
+                      </a:r>
+                      <a:endParaRPr sz="1200">
+                        <a:solidFill>
+                          <a:srgbClr val="525252"/>
+                        </a:solidFill>
+                        <a:highlight>
+                          <a:srgbClr val="FFFFFF"/>
+                        </a:highlight>
+                      </a:endParaRPr>
+                    </a:p>
+                  </a:txBody>
+                  <a:tcPr marT="91425" marB="91425" marR="91425" marL="91425" anchor="ctr">
+                    <a:lnT cap="flat" cmpd="sng" w="9525">
+                      <a:solidFill>
+                        <a:srgbClr val="F4F4F4"/>
+                      </a:solidFill>
+                      <a:prstDash val="solid"/>
+                      <a:round/>
+                      <a:headEnd len="sm" w="sm" type="none"/>
+                      <a:tailEnd len="sm" w="sm" type="none"/>
+                    </a:lnT>
+                    <a:lnB cap="flat" cmpd="sng" w="9525">
+                      <a:solidFill>
+                        <a:srgbClr val="E0E0E0"/>
+                      </a:solidFill>
+                      <a:prstDash val="solid"/>
+                      <a:round/>
+                      <a:headEnd len="sm" w="sm" type="none"/>
+                      <a:tailEnd len="sm" w="sm" type="none"/>
+                    </a:lnB>
+                  </a:tcPr>
+                </a:tc>
+              </a:tr>
+              <a:tr h="387850">
+                <a:tc>
+                  <a:txBody>
+                    <a:bodyPr/>
+                    <a:lstStyle/>
+                    <a:p>
+                      <a:pPr indent="0" lvl="0" marL="0" rtl="0" algn="l">
+                        <a:lnSpc>
+                          <a:spcPct val="115000"/>
+                        </a:lnSpc>
+                        <a:spcBef>
+                          <a:spcPts val="0"/>
+                        </a:spcBef>
+                        <a:spcAft>
+                          <a:spcPts val="0"/>
+                        </a:spcAft>
+                        <a:buNone/>
+                      </a:pPr>
+                      <a:r>
+                        <a:rPr lang="zh-TW" sz="1200">
+                          <a:solidFill>
+                            <a:srgbClr val="525252"/>
+                          </a:solidFill>
+                          <a:highlight>
+                            <a:srgbClr val="FFFFFF"/>
+                          </a:highlight>
+                        </a:rPr>
+                        <a:t>110000 - Internetwork_Control</a:t>
+                      </a:r>
+                      <a:endParaRPr sz="1200">
+                        <a:solidFill>
+                          <a:srgbClr val="525252"/>
+                        </a:solidFill>
+                        <a:highlight>
+                          <a:srgbClr val="FFFFFF"/>
+                        </a:highlight>
+                      </a:endParaRPr>
+                    </a:p>
+                  </a:txBody>
+                  <a:tcPr marT="91425" marB="91425" marR="91425" marL="91425" anchor="ctr">
+                    <a:lnT cap="flat" cmpd="sng" w="9525">
+                      <a:solidFill>
+                        <a:srgbClr val="E0E0E0"/>
+                      </a:solidFill>
+                      <a:prstDash val="solid"/>
+                      <a:round/>
+                      <a:headEnd len="sm" w="sm" type="none"/>
+                      <a:tailEnd len="sm" w="sm" type="none"/>
+                    </a:lnT>
+                    <a:lnB cap="flat" cmpd="sng" w="9525">
+                      <a:solidFill>
+                        <a:srgbClr val="E0E0E0"/>
+                      </a:solidFill>
+                      <a:prstDash val="solid"/>
+                      <a:round/>
+                      <a:headEnd len="sm" w="sm" type="none"/>
+                      <a:tailEnd len="sm" w="sm" type="none"/>
+                    </a:lnB>
+                  </a:tcPr>
+                </a:tc>
+                <a:tc>
+                  <a:txBody>
+                    <a:bodyPr/>
+                    <a:lstStyle/>
+                    <a:p>
+                      <a:pPr indent="0" lvl="0" marL="0" rtl="0" algn="l">
+                        <a:lnSpc>
+                          <a:spcPct val="115000"/>
+                        </a:lnSpc>
+                        <a:spcBef>
+                          <a:spcPts val="0"/>
+                        </a:spcBef>
+                        <a:spcAft>
+                          <a:spcPts val="0"/>
+                        </a:spcAft>
+                        <a:buNone/>
+                      </a:pPr>
+                      <a:r>
+                        <a:rPr lang="zh-TW" sz="1200">
+                          <a:solidFill>
+                            <a:srgbClr val="525252"/>
+                          </a:solidFill>
+                          <a:highlight>
+                            <a:srgbClr val="FFFFFF"/>
+                          </a:highlight>
+                        </a:rPr>
+                        <a:t>6</a:t>
+                      </a:r>
+                      <a:endParaRPr sz="1200">
+                        <a:solidFill>
+                          <a:srgbClr val="525252"/>
+                        </a:solidFill>
+                        <a:highlight>
+                          <a:srgbClr val="FFFFFF"/>
+                        </a:highlight>
+                      </a:endParaRPr>
+                    </a:p>
+                  </a:txBody>
+                  <a:tcPr marT="91425" marB="91425" marR="91425" marL="91425" anchor="ctr">
+                    <a:lnT cap="flat" cmpd="sng" w="9525">
+                      <a:solidFill>
+                        <a:srgbClr val="E0E0E0"/>
+                      </a:solidFill>
+                      <a:prstDash val="solid"/>
+                      <a:round/>
+                      <a:headEnd len="sm" w="sm" type="none"/>
+                      <a:tailEnd len="sm" w="sm" type="none"/>
+                    </a:lnT>
+                    <a:lnB cap="flat" cmpd="sng" w="9525">
+                      <a:solidFill>
+                        <a:srgbClr val="E0E0E0"/>
+                      </a:solidFill>
+                      <a:prstDash val="solid"/>
+                      <a:round/>
+                      <a:headEnd len="sm" w="sm" type="none"/>
+                      <a:tailEnd len="sm" w="sm" type="none"/>
+                    </a:lnB>
+                  </a:tcPr>
+                </a:tc>
+                <a:tc>
+                  <a:txBody>
+                    <a:bodyPr/>
+                    <a:lstStyle/>
+                    <a:p>
+                      <a:pPr indent="0" lvl="0" marL="0" rtl="0" algn="l">
+                        <a:lnSpc>
+                          <a:spcPct val="115000"/>
+                        </a:lnSpc>
+                        <a:spcBef>
+                          <a:spcPts val="0"/>
+                        </a:spcBef>
+                        <a:spcAft>
+                          <a:spcPts val="0"/>
+                        </a:spcAft>
+                        <a:buNone/>
+                      </a:pPr>
+                      <a:r>
+                        <a:rPr lang="zh-TW" sz="1200">
+                          <a:solidFill>
+                            <a:srgbClr val="525252"/>
+                          </a:solidFill>
+                          <a:highlight>
+                            <a:srgbClr val="FFFFFF"/>
+                          </a:highlight>
+                        </a:rPr>
+                        <a:t>1</a:t>
+                      </a:r>
+                      <a:endParaRPr sz="1200">
+                        <a:solidFill>
+                          <a:srgbClr val="525252"/>
+                        </a:solidFill>
+                        <a:highlight>
+                          <a:srgbClr val="FFFFFF"/>
+                        </a:highlight>
+                      </a:endParaRPr>
+                    </a:p>
+                  </a:txBody>
+                  <a:tcPr marT="91425" marB="91425" marR="91425" marL="91425" anchor="ctr">
+                    <a:lnT cap="flat" cmpd="sng" w="9525">
+                      <a:solidFill>
+                        <a:srgbClr val="E0E0E0"/>
+                      </a:solidFill>
+                      <a:prstDash val="solid"/>
+                      <a:round/>
+                      <a:headEnd len="sm" w="sm" type="none"/>
+                      <a:tailEnd len="sm" w="sm" type="none"/>
+                    </a:lnT>
+                    <a:lnB cap="flat" cmpd="sng" w="9525">
+                      <a:solidFill>
+                        <a:srgbClr val="E0E0E0"/>
+                      </a:solidFill>
+                      <a:prstDash val="solid"/>
+                      <a:round/>
+                      <a:headEnd len="sm" w="sm" type="none"/>
+                      <a:tailEnd len="sm" w="sm" type="none"/>
+                    </a:lnB>
+                  </a:tcPr>
+                </a:tc>
+              </a:tr>
+              <a:tr h="387850">
+                <a:tc>
+                  <a:txBody>
+                    <a:bodyPr/>
+                    <a:lstStyle/>
+                    <a:p>
+                      <a:pPr indent="0" lvl="0" marL="0" rtl="0" algn="l">
+                        <a:lnSpc>
+                          <a:spcPct val="115000"/>
+                        </a:lnSpc>
+                        <a:spcBef>
+                          <a:spcPts val="0"/>
+                        </a:spcBef>
+                        <a:spcAft>
+                          <a:spcPts val="0"/>
+                        </a:spcAft>
+                        <a:buNone/>
+                      </a:pPr>
+                      <a:r>
+                        <a:rPr lang="zh-TW" sz="1200">
+                          <a:solidFill>
+                            <a:srgbClr val="525252"/>
+                          </a:solidFill>
+                          <a:highlight>
+                            <a:srgbClr val="FFFFFF"/>
+                          </a:highlight>
+                        </a:rPr>
+                        <a:t>101000 - Critical_/_Realtime</a:t>
+                      </a:r>
+                      <a:endParaRPr sz="1200">
+                        <a:solidFill>
+                          <a:srgbClr val="525252"/>
+                        </a:solidFill>
+                        <a:highlight>
+                          <a:srgbClr val="FFFFFF"/>
+                        </a:highlight>
+                      </a:endParaRPr>
+                    </a:p>
+                  </a:txBody>
+                  <a:tcPr marT="91425" marB="91425" marR="91425" marL="91425" anchor="ctr">
+                    <a:lnT cap="flat" cmpd="sng" w="9525">
+                      <a:solidFill>
+                        <a:srgbClr val="E0E0E0"/>
+                      </a:solidFill>
+                      <a:prstDash val="solid"/>
+                      <a:round/>
+                      <a:headEnd len="sm" w="sm" type="none"/>
+                      <a:tailEnd len="sm" w="sm" type="none"/>
+                    </a:lnT>
+                    <a:lnB cap="flat" cmpd="sng" w="9525">
+                      <a:solidFill>
+                        <a:srgbClr val="E0E0E0"/>
+                      </a:solidFill>
+                      <a:prstDash val="solid"/>
+                      <a:round/>
+                      <a:headEnd len="sm" w="sm" type="none"/>
+                      <a:tailEnd len="sm" w="sm" type="none"/>
+                    </a:lnB>
+                    <a:solidFill>
+                      <a:srgbClr val="00FFFF"/>
+                    </a:solidFill>
+                  </a:tcPr>
+                </a:tc>
+                <a:tc>
+                  <a:txBody>
+                    <a:bodyPr/>
+                    <a:lstStyle/>
+                    <a:p>
+                      <a:pPr indent="0" lvl="0" marL="0" rtl="0" algn="l">
+                        <a:lnSpc>
+                          <a:spcPct val="115000"/>
+                        </a:lnSpc>
+                        <a:spcBef>
+                          <a:spcPts val="0"/>
+                        </a:spcBef>
+                        <a:spcAft>
+                          <a:spcPts val="0"/>
+                        </a:spcAft>
+                        <a:buNone/>
+                      </a:pPr>
+                      <a:r>
+                        <a:rPr lang="zh-TW" sz="1200">
+                          <a:solidFill>
+                            <a:srgbClr val="525252"/>
+                          </a:solidFill>
+                          <a:highlight>
+                            <a:srgbClr val="FFFFFF"/>
+                          </a:highlight>
+                        </a:rPr>
+                        <a:t>5</a:t>
+                      </a:r>
+                      <a:endParaRPr sz="1200">
+                        <a:solidFill>
+                          <a:srgbClr val="525252"/>
+                        </a:solidFill>
+                        <a:highlight>
+                          <a:srgbClr val="FFFFFF"/>
+                        </a:highlight>
+                      </a:endParaRPr>
+                    </a:p>
+                  </a:txBody>
+                  <a:tcPr marT="91425" marB="91425" marR="91425" marL="91425" anchor="ctr">
+                    <a:lnT cap="flat" cmpd="sng" w="9525">
+                      <a:solidFill>
+                        <a:srgbClr val="E0E0E0"/>
+                      </a:solidFill>
+                      <a:prstDash val="solid"/>
+                      <a:round/>
+                      <a:headEnd len="sm" w="sm" type="none"/>
+                      <a:tailEnd len="sm" w="sm" type="none"/>
+                    </a:lnT>
+                    <a:lnB cap="flat" cmpd="sng" w="9525">
+                      <a:solidFill>
+                        <a:srgbClr val="E0E0E0"/>
+                      </a:solidFill>
+                      <a:prstDash val="solid"/>
+                      <a:round/>
+                      <a:headEnd len="sm" w="sm" type="none"/>
+                      <a:tailEnd len="sm" w="sm" type="none"/>
+                    </a:lnB>
+                    <a:solidFill>
+                      <a:srgbClr val="00FFFF"/>
+                    </a:solidFill>
+                  </a:tcPr>
+                </a:tc>
+                <a:tc>
+                  <a:txBody>
+                    <a:bodyPr/>
+                    <a:lstStyle/>
+                    <a:p>
+                      <a:pPr indent="0" lvl="0" marL="0" rtl="0" algn="l">
+                        <a:lnSpc>
+                          <a:spcPct val="115000"/>
+                        </a:lnSpc>
+                        <a:spcBef>
+                          <a:spcPts val="0"/>
+                        </a:spcBef>
+                        <a:spcAft>
+                          <a:spcPts val="0"/>
+                        </a:spcAft>
+                        <a:buNone/>
+                      </a:pPr>
+                      <a:r>
+                        <a:rPr lang="zh-TW" sz="1200">
+                          <a:solidFill>
+                            <a:srgbClr val="525252"/>
+                          </a:solidFill>
+                          <a:highlight>
+                            <a:srgbClr val="FFFFFF"/>
+                          </a:highlight>
+                        </a:rPr>
+                        <a:t>2</a:t>
+                      </a:r>
+                      <a:endParaRPr sz="1200">
+                        <a:solidFill>
+                          <a:srgbClr val="525252"/>
+                        </a:solidFill>
+                        <a:highlight>
+                          <a:srgbClr val="FFFFFF"/>
+                        </a:highlight>
+                      </a:endParaRPr>
+                    </a:p>
+                  </a:txBody>
+                  <a:tcPr marT="91425" marB="91425" marR="91425" marL="91425" anchor="ctr">
+                    <a:lnT cap="flat" cmpd="sng" w="9525">
+                      <a:solidFill>
+                        <a:srgbClr val="E0E0E0"/>
+                      </a:solidFill>
+                      <a:prstDash val="solid"/>
+                      <a:round/>
+                      <a:headEnd len="sm" w="sm" type="none"/>
+                      <a:tailEnd len="sm" w="sm" type="none"/>
+                    </a:lnT>
+                    <a:lnB cap="flat" cmpd="sng" w="9525">
+                      <a:solidFill>
+                        <a:srgbClr val="E0E0E0"/>
+                      </a:solidFill>
+                      <a:prstDash val="solid"/>
+                      <a:round/>
+                      <a:headEnd len="sm" w="sm" type="none"/>
+                      <a:tailEnd len="sm" w="sm" type="none"/>
+                    </a:lnB>
+                  </a:tcPr>
+                </a:tc>
+              </a:tr>
+              <a:tr h="387850">
+                <a:tc>
+                  <a:txBody>
+                    <a:bodyPr/>
+                    <a:lstStyle/>
+                    <a:p>
+                      <a:pPr indent="0" lvl="0" marL="0" rtl="0" algn="l">
+                        <a:lnSpc>
+                          <a:spcPct val="115000"/>
+                        </a:lnSpc>
+                        <a:spcBef>
+                          <a:spcPts val="0"/>
+                        </a:spcBef>
+                        <a:spcAft>
+                          <a:spcPts val="0"/>
+                        </a:spcAft>
+                        <a:buNone/>
+                      </a:pPr>
+                      <a:r>
+                        <a:rPr lang="zh-TW" sz="1200">
+                          <a:solidFill>
+                            <a:srgbClr val="525252"/>
+                          </a:solidFill>
+                          <a:highlight>
+                            <a:srgbClr val="FFFFFF"/>
+                          </a:highlight>
+                        </a:rPr>
+                        <a:t>100000 - Interactive_1</a:t>
+                      </a:r>
+                      <a:endParaRPr sz="1200">
+                        <a:solidFill>
+                          <a:srgbClr val="525252"/>
+                        </a:solidFill>
+                        <a:highlight>
+                          <a:srgbClr val="FFFFFF"/>
+                        </a:highlight>
+                      </a:endParaRPr>
+                    </a:p>
+                  </a:txBody>
+                  <a:tcPr marT="91425" marB="91425" marR="91425" marL="91425" anchor="ctr">
+                    <a:lnT cap="flat" cmpd="sng" w="9525">
+                      <a:solidFill>
+                        <a:srgbClr val="E0E0E0"/>
+                      </a:solidFill>
+                      <a:prstDash val="solid"/>
+                      <a:round/>
+                      <a:headEnd len="sm" w="sm" type="none"/>
+                      <a:tailEnd len="sm" w="sm" type="none"/>
+                    </a:lnT>
+                    <a:lnB cap="flat" cmpd="sng" w="9525">
+                      <a:solidFill>
+                        <a:srgbClr val="E0E0E0"/>
+                      </a:solidFill>
+                      <a:prstDash val="solid"/>
+                      <a:round/>
+                      <a:headEnd len="sm" w="sm" type="none"/>
+                      <a:tailEnd len="sm" w="sm" type="none"/>
+                    </a:lnB>
+                    <a:solidFill>
+                      <a:srgbClr val="00FFFF"/>
+                    </a:solidFill>
+                  </a:tcPr>
+                </a:tc>
+                <a:tc>
+                  <a:txBody>
+                    <a:bodyPr/>
+                    <a:lstStyle/>
+                    <a:p>
+                      <a:pPr indent="0" lvl="0" marL="0" rtl="0" algn="l">
+                        <a:lnSpc>
+                          <a:spcPct val="115000"/>
+                        </a:lnSpc>
+                        <a:spcBef>
+                          <a:spcPts val="0"/>
+                        </a:spcBef>
+                        <a:spcAft>
+                          <a:spcPts val="0"/>
+                        </a:spcAft>
+                        <a:buNone/>
+                      </a:pPr>
+                      <a:r>
+                        <a:rPr lang="zh-TW" sz="1200">
+                          <a:solidFill>
+                            <a:srgbClr val="525252"/>
+                          </a:solidFill>
+                          <a:highlight>
+                            <a:srgbClr val="FFFFFF"/>
+                          </a:highlight>
+                        </a:rPr>
+                        <a:t>4</a:t>
+                      </a:r>
+                      <a:endParaRPr sz="1200">
+                        <a:solidFill>
+                          <a:srgbClr val="525252"/>
+                        </a:solidFill>
+                        <a:highlight>
+                          <a:srgbClr val="FFFFFF"/>
+                        </a:highlight>
+                      </a:endParaRPr>
+                    </a:p>
+                  </a:txBody>
+                  <a:tcPr marT="91425" marB="91425" marR="91425" marL="91425" anchor="ctr">
+                    <a:lnT cap="flat" cmpd="sng" w="9525">
+                      <a:solidFill>
+                        <a:srgbClr val="E0E0E0"/>
+                      </a:solidFill>
+                      <a:prstDash val="solid"/>
+                      <a:round/>
+                      <a:headEnd len="sm" w="sm" type="none"/>
+                      <a:tailEnd len="sm" w="sm" type="none"/>
+                    </a:lnT>
+                    <a:lnB cap="flat" cmpd="sng" w="9525">
+                      <a:solidFill>
+                        <a:srgbClr val="E0E0E0"/>
+                      </a:solidFill>
+                      <a:prstDash val="solid"/>
+                      <a:round/>
+                      <a:headEnd len="sm" w="sm" type="none"/>
+                      <a:tailEnd len="sm" w="sm" type="none"/>
+                    </a:lnB>
+                    <a:solidFill>
+                      <a:srgbClr val="00FFFF"/>
+                    </a:solidFill>
+                  </a:tcPr>
+                </a:tc>
+                <a:tc>
+                  <a:txBody>
+                    <a:bodyPr/>
+                    <a:lstStyle/>
+                    <a:p>
+                      <a:pPr indent="0" lvl="0" marL="0" rtl="0" algn="l">
+                        <a:lnSpc>
+                          <a:spcPct val="115000"/>
+                        </a:lnSpc>
+                        <a:spcBef>
+                          <a:spcPts val="0"/>
+                        </a:spcBef>
+                        <a:spcAft>
+                          <a:spcPts val="0"/>
+                        </a:spcAft>
+                        <a:buNone/>
+                      </a:pPr>
+                      <a:r>
+                        <a:rPr lang="zh-TW" sz="1200">
+                          <a:solidFill>
+                            <a:srgbClr val="525252"/>
+                          </a:solidFill>
+                          <a:highlight>
+                            <a:srgbClr val="FFFFFF"/>
+                          </a:highlight>
+                        </a:rPr>
+                        <a:t>2</a:t>
+                      </a:r>
+                      <a:endParaRPr sz="1200">
+                        <a:solidFill>
+                          <a:srgbClr val="525252"/>
+                        </a:solidFill>
+                        <a:highlight>
+                          <a:srgbClr val="FFFFFF"/>
+                        </a:highlight>
+                      </a:endParaRPr>
+                    </a:p>
+                  </a:txBody>
+                  <a:tcPr marT="91425" marB="91425" marR="91425" marL="91425" anchor="ctr">
+                    <a:lnT cap="flat" cmpd="sng" w="9525">
+                      <a:solidFill>
+                        <a:srgbClr val="E0E0E0"/>
+                      </a:solidFill>
+                      <a:prstDash val="solid"/>
+                      <a:round/>
+                      <a:headEnd len="sm" w="sm" type="none"/>
+                      <a:tailEnd len="sm" w="sm" type="none"/>
+                    </a:lnT>
+                    <a:lnB cap="flat" cmpd="sng" w="9525">
+                      <a:solidFill>
+                        <a:srgbClr val="E0E0E0"/>
+                      </a:solidFill>
+                      <a:prstDash val="solid"/>
+                      <a:round/>
+                      <a:headEnd len="sm" w="sm" type="none"/>
+                      <a:tailEnd len="sm" w="sm" type="none"/>
+                    </a:lnB>
+                  </a:tcPr>
+                </a:tc>
+              </a:tr>
+              <a:tr h="387850">
+                <a:tc>
+                  <a:txBody>
+                    <a:bodyPr/>
+                    <a:lstStyle/>
+                    <a:p>
+                      <a:pPr indent="0" lvl="0" marL="0" rtl="0" algn="l">
+                        <a:lnSpc>
+                          <a:spcPct val="115000"/>
+                        </a:lnSpc>
+                        <a:spcBef>
+                          <a:spcPts val="0"/>
+                        </a:spcBef>
+                        <a:spcAft>
+                          <a:spcPts val="0"/>
+                        </a:spcAft>
+                        <a:buNone/>
+                      </a:pPr>
+                      <a:r>
+                        <a:rPr lang="zh-TW" sz="1200">
+                          <a:solidFill>
+                            <a:srgbClr val="525252"/>
+                          </a:solidFill>
+                          <a:highlight>
+                            <a:srgbClr val="FFFFFF"/>
+                          </a:highlight>
+                        </a:rPr>
+                        <a:t>011000 - Interactive_2</a:t>
+                      </a:r>
+                      <a:endParaRPr sz="1200">
+                        <a:solidFill>
+                          <a:srgbClr val="525252"/>
+                        </a:solidFill>
+                        <a:highlight>
+                          <a:srgbClr val="FFFFFF"/>
+                        </a:highlight>
+                      </a:endParaRPr>
+                    </a:p>
+                  </a:txBody>
+                  <a:tcPr marT="91425" marB="91425" marR="91425" marL="91425" anchor="ctr">
+                    <a:lnT cap="flat" cmpd="sng" w="9525">
+                      <a:solidFill>
+                        <a:srgbClr val="E0E0E0"/>
+                      </a:solidFill>
+                      <a:prstDash val="solid"/>
+                      <a:round/>
+                      <a:headEnd len="sm" w="sm" type="none"/>
+                      <a:tailEnd len="sm" w="sm" type="none"/>
+                    </a:lnT>
+                    <a:lnB cap="flat" cmpd="sng" w="9525">
+                      <a:solidFill>
+                        <a:srgbClr val="E0E0E0"/>
+                      </a:solidFill>
+                      <a:prstDash val="solid"/>
+                      <a:round/>
+                      <a:headEnd len="sm" w="sm" type="none"/>
+                      <a:tailEnd len="sm" w="sm" type="none"/>
+                    </a:lnB>
+                  </a:tcPr>
+                </a:tc>
+                <a:tc>
+                  <a:txBody>
+                    <a:bodyPr/>
+                    <a:lstStyle/>
+                    <a:p>
+                      <a:pPr indent="0" lvl="0" marL="0" rtl="0" algn="l">
+                        <a:lnSpc>
+                          <a:spcPct val="115000"/>
+                        </a:lnSpc>
+                        <a:spcBef>
+                          <a:spcPts val="0"/>
+                        </a:spcBef>
+                        <a:spcAft>
+                          <a:spcPts val="0"/>
+                        </a:spcAft>
+                        <a:buNone/>
+                      </a:pPr>
+                      <a:r>
+                        <a:rPr lang="zh-TW" sz="1200">
+                          <a:solidFill>
+                            <a:srgbClr val="525252"/>
+                          </a:solidFill>
+                          <a:highlight>
+                            <a:srgbClr val="FFFFFF"/>
+                          </a:highlight>
+                        </a:rPr>
+                        <a:t>3</a:t>
+                      </a:r>
+                      <a:endParaRPr sz="1200">
+                        <a:solidFill>
+                          <a:srgbClr val="525252"/>
+                        </a:solidFill>
+                        <a:highlight>
+                          <a:srgbClr val="FFFFFF"/>
+                        </a:highlight>
+                      </a:endParaRPr>
+                    </a:p>
+                  </a:txBody>
+                  <a:tcPr marT="91425" marB="91425" marR="91425" marL="91425" anchor="ctr">
+                    <a:lnT cap="flat" cmpd="sng" w="9525">
+                      <a:solidFill>
+                        <a:srgbClr val="E0E0E0"/>
+                      </a:solidFill>
+                      <a:prstDash val="solid"/>
+                      <a:round/>
+                      <a:headEnd len="sm" w="sm" type="none"/>
+                      <a:tailEnd len="sm" w="sm" type="none"/>
+                    </a:lnT>
+                    <a:lnB cap="flat" cmpd="sng" w="9525">
+                      <a:solidFill>
+                        <a:srgbClr val="E0E0E0"/>
+                      </a:solidFill>
+                      <a:prstDash val="solid"/>
+                      <a:round/>
+                      <a:headEnd len="sm" w="sm" type="none"/>
+                      <a:tailEnd len="sm" w="sm" type="none"/>
+                    </a:lnB>
+                  </a:tcPr>
+                </a:tc>
+                <a:tc>
+                  <a:txBody>
+                    <a:bodyPr/>
+                    <a:lstStyle/>
+                    <a:p>
+                      <a:pPr indent="0" lvl="0" marL="0" rtl="0" algn="l">
+                        <a:lnSpc>
+                          <a:spcPct val="115000"/>
+                        </a:lnSpc>
+                        <a:spcBef>
+                          <a:spcPts val="0"/>
+                        </a:spcBef>
+                        <a:spcAft>
+                          <a:spcPts val="0"/>
+                        </a:spcAft>
+                        <a:buNone/>
+                      </a:pPr>
+                      <a:r>
+                        <a:rPr lang="zh-TW" sz="1200">
+                          <a:solidFill>
+                            <a:srgbClr val="525252"/>
+                          </a:solidFill>
+                          <a:highlight>
+                            <a:srgbClr val="FFFFFF"/>
+                          </a:highlight>
+                        </a:rPr>
+                        <a:t>3</a:t>
+                      </a:r>
+                      <a:endParaRPr sz="1200">
+                        <a:solidFill>
+                          <a:srgbClr val="525252"/>
+                        </a:solidFill>
+                        <a:highlight>
+                          <a:srgbClr val="FFFFFF"/>
+                        </a:highlight>
+                      </a:endParaRPr>
+                    </a:p>
+                  </a:txBody>
+                  <a:tcPr marT="91425" marB="91425" marR="91425" marL="91425" anchor="ctr">
+                    <a:lnT cap="flat" cmpd="sng" w="9525">
+                      <a:solidFill>
+                        <a:srgbClr val="E0E0E0"/>
+                      </a:solidFill>
+                      <a:prstDash val="solid"/>
+                      <a:round/>
+                      <a:headEnd len="sm" w="sm" type="none"/>
+                      <a:tailEnd len="sm" w="sm" type="none"/>
+                    </a:lnT>
+                    <a:lnB cap="flat" cmpd="sng" w="9525">
+                      <a:solidFill>
+                        <a:srgbClr val="E0E0E0"/>
+                      </a:solidFill>
+                      <a:prstDash val="solid"/>
+                      <a:round/>
+                      <a:headEnd len="sm" w="sm" type="none"/>
+                      <a:tailEnd len="sm" w="sm" type="none"/>
+                    </a:lnB>
+                  </a:tcPr>
+                </a:tc>
+              </a:tr>
+              <a:tr h="387850">
+                <a:tc>
+                  <a:txBody>
+                    <a:bodyPr/>
+                    <a:lstStyle/>
+                    <a:p>
+                      <a:pPr indent="0" lvl="0" marL="0" rtl="0" algn="l">
+                        <a:lnSpc>
+                          <a:spcPct val="115000"/>
+                        </a:lnSpc>
+                        <a:spcBef>
+                          <a:spcPts val="0"/>
+                        </a:spcBef>
+                        <a:spcAft>
+                          <a:spcPts val="0"/>
+                        </a:spcAft>
+                        <a:buNone/>
+                      </a:pPr>
+                      <a:r>
+                        <a:rPr lang="zh-TW" sz="1200">
+                          <a:solidFill>
+                            <a:srgbClr val="525252"/>
+                          </a:solidFill>
+                          <a:highlight>
+                            <a:srgbClr val="FFFFFF"/>
+                          </a:highlight>
+                        </a:rPr>
+                        <a:t>010000 - Batch_1</a:t>
+                      </a:r>
+                      <a:endParaRPr sz="1200">
+                        <a:solidFill>
+                          <a:srgbClr val="525252"/>
+                        </a:solidFill>
+                        <a:highlight>
+                          <a:srgbClr val="FFFFFF"/>
+                        </a:highlight>
+                      </a:endParaRPr>
+                    </a:p>
+                  </a:txBody>
+                  <a:tcPr marT="91425" marB="91425" marR="91425" marL="91425" anchor="ctr">
+                    <a:lnT cap="flat" cmpd="sng" w="9525">
+                      <a:solidFill>
+                        <a:srgbClr val="E0E0E0"/>
+                      </a:solidFill>
+                      <a:prstDash val="solid"/>
+                      <a:round/>
+                      <a:headEnd len="sm" w="sm" type="none"/>
+                      <a:tailEnd len="sm" w="sm" type="none"/>
+                    </a:lnT>
+                    <a:lnB cap="flat" cmpd="sng" w="9525">
+                      <a:solidFill>
+                        <a:srgbClr val="E0E0E0"/>
+                      </a:solidFill>
+                      <a:prstDash val="solid"/>
+                      <a:round/>
+                      <a:headEnd len="sm" w="sm" type="none"/>
+                      <a:tailEnd len="sm" w="sm" type="none"/>
+                    </a:lnB>
+                  </a:tcPr>
+                </a:tc>
+                <a:tc>
+                  <a:txBody>
+                    <a:bodyPr/>
+                    <a:lstStyle/>
+                    <a:p>
+                      <a:pPr indent="0" lvl="0" marL="0" rtl="0" algn="l">
+                        <a:lnSpc>
+                          <a:spcPct val="115000"/>
+                        </a:lnSpc>
+                        <a:spcBef>
+                          <a:spcPts val="0"/>
+                        </a:spcBef>
+                        <a:spcAft>
+                          <a:spcPts val="0"/>
+                        </a:spcAft>
+                        <a:buNone/>
+                      </a:pPr>
+                      <a:r>
+                        <a:rPr lang="zh-TW" sz="1200">
+                          <a:solidFill>
+                            <a:srgbClr val="525252"/>
+                          </a:solidFill>
+                          <a:highlight>
+                            <a:srgbClr val="FFFFFF"/>
+                          </a:highlight>
+                        </a:rPr>
+                        <a:t>2</a:t>
+                      </a:r>
+                      <a:endParaRPr sz="1200">
+                        <a:solidFill>
+                          <a:srgbClr val="525252"/>
+                        </a:solidFill>
+                        <a:highlight>
+                          <a:srgbClr val="FFFFFF"/>
+                        </a:highlight>
+                      </a:endParaRPr>
+                    </a:p>
+                  </a:txBody>
+                  <a:tcPr marT="91425" marB="91425" marR="91425" marL="91425" anchor="ctr">
+                    <a:lnT cap="flat" cmpd="sng" w="9525">
+                      <a:solidFill>
+                        <a:srgbClr val="E0E0E0"/>
+                      </a:solidFill>
+                      <a:prstDash val="solid"/>
+                      <a:round/>
+                      <a:headEnd len="sm" w="sm" type="none"/>
+                      <a:tailEnd len="sm" w="sm" type="none"/>
+                    </a:lnT>
+                    <a:lnB cap="flat" cmpd="sng" w="9525">
+                      <a:solidFill>
+                        <a:srgbClr val="E0E0E0"/>
+                      </a:solidFill>
+                      <a:prstDash val="solid"/>
+                      <a:round/>
+                      <a:headEnd len="sm" w="sm" type="none"/>
+                      <a:tailEnd len="sm" w="sm" type="none"/>
+                    </a:lnB>
+                  </a:tcPr>
+                </a:tc>
+                <a:tc>
+                  <a:txBody>
+                    <a:bodyPr/>
+                    <a:lstStyle/>
+                    <a:p>
+                      <a:pPr indent="0" lvl="0" marL="0" rtl="0" algn="l">
+                        <a:lnSpc>
+                          <a:spcPct val="115000"/>
+                        </a:lnSpc>
+                        <a:spcBef>
+                          <a:spcPts val="0"/>
+                        </a:spcBef>
+                        <a:spcAft>
+                          <a:spcPts val="0"/>
+                        </a:spcAft>
+                        <a:buNone/>
+                      </a:pPr>
+                      <a:r>
+                        <a:rPr lang="zh-TW" sz="1200">
+                          <a:solidFill>
+                            <a:srgbClr val="525252"/>
+                          </a:solidFill>
+                          <a:highlight>
+                            <a:srgbClr val="FFFFFF"/>
+                          </a:highlight>
+                        </a:rPr>
+                        <a:t>3</a:t>
+                      </a:r>
+                      <a:endParaRPr sz="1200">
+                        <a:solidFill>
+                          <a:srgbClr val="525252"/>
+                        </a:solidFill>
+                        <a:highlight>
+                          <a:srgbClr val="FFFFFF"/>
+                        </a:highlight>
+                      </a:endParaRPr>
+                    </a:p>
+                  </a:txBody>
+                  <a:tcPr marT="91425" marB="91425" marR="91425" marL="91425" anchor="ctr">
+                    <a:lnT cap="flat" cmpd="sng" w="9525">
+                      <a:solidFill>
+                        <a:srgbClr val="E0E0E0"/>
+                      </a:solidFill>
+                      <a:prstDash val="solid"/>
+                      <a:round/>
+                      <a:headEnd len="sm" w="sm" type="none"/>
+                      <a:tailEnd len="sm" w="sm" type="none"/>
+                    </a:lnT>
+                    <a:lnB cap="flat" cmpd="sng" w="9525">
+                      <a:solidFill>
+                        <a:srgbClr val="E0E0E0"/>
+                      </a:solidFill>
+                      <a:prstDash val="solid"/>
+                      <a:round/>
+                      <a:headEnd len="sm" w="sm" type="none"/>
+                      <a:tailEnd len="sm" w="sm" type="none"/>
+                    </a:lnB>
+                  </a:tcPr>
+                </a:tc>
+              </a:tr>
+              <a:tr h="387850">
+                <a:tc>
+                  <a:txBody>
+                    <a:bodyPr/>
+                    <a:lstStyle/>
+                    <a:p>
+                      <a:pPr indent="0" lvl="0" marL="0" rtl="0" algn="l">
+                        <a:lnSpc>
+                          <a:spcPct val="115000"/>
+                        </a:lnSpc>
+                        <a:spcBef>
+                          <a:spcPts val="0"/>
+                        </a:spcBef>
+                        <a:spcAft>
+                          <a:spcPts val="0"/>
+                        </a:spcAft>
+                        <a:buNone/>
+                      </a:pPr>
+                      <a:r>
+                        <a:rPr lang="zh-TW" sz="1200">
+                          <a:solidFill>
+                            <a:srgbClr val="525252"/>
+                          </a:solidFill>
+                          <a:highlight>
+                            <a:srgbClr val="FFFFFF"/>
+                          </a:highlight>
+                        </a:rPr>
+                        <a:t>001000 - Batch_2</a:t>
+                      </a:r>
+                      <a:endParaRPr sz="1200">
+                        <a:solidFill>
+                          <a:srgbClr val="525252"/>
+                        </a:solidFill>
+                        <a:highlight>
+                          <a:srgbClr val="FFFFFF"/>
+                        </a:highlight>
+                      </a:endParaRPr>
+                    </a:p>
+                  </a:txBody>
+                  <a:tcPr marT="91425" marB="91425" marR="91425" marL="91425" anchor="ctr">
+                    <a:lnT cap="flat" cmpd="sng" w="9525">
+                      <a:solidFill>
+                        <a:srgbClr val="E0E0E0"/>
+                      </a:solidFill>
+                      <a:prstDash val="solid"/>
+                      <a:round/>
+                      <a:headEnd len="sm" w="sm" type="none"/>
+                      <a:tailEnd len="sm" w="sm" type="none"/>
+                    </a:lnT>
+                    <a:lnB cap="flat" cmpd="sng" w="9525">
+                      <a:solidFill>
+                        <a:srgbClr val="E0E0E0"/>
+                      </a:solidFill>
+                      <a:prstDash val="solid"/>
+                      <a:round/>
+                      <a:headEnd len="sm" w="sm" type="none"/>
+                      <a:tailEnd len="sm" w="sm" type="none"/>
+                    </a:lnB>
+                  </a:tcPr>
+                </a:tc>
+                <a:tc>
+                  <a:txBody>
+                    <a:bodyPr/>
+                    <a:lstStyle/>
+                    <a:p>
+                      <a:pPr indent="0" lvl="0" marL="0" rtl="0" algn="l">
+                        <a:lnSpc>
+                          <a:spcPct val="115000"/>
+                        </a:lnSpc>
+                        <a:spcBef>
+                          <a:spcPts val="0"/>
+                        </a:spcBef>
+                        <a:spcAft>
+                          <a:spcPts val="0"/>
+                        </a:spcAft>
+                        <a:buNone/>
+                      </a:pPr>
+                      <a:r>
+                        <a:rPr lang="zh-TW" sz="1200">
+                          <a:solidFill>
+                            <a:srgbClr val="525252"/>
+                          </a:solidFill>
+                          <a:highlight>
+                            <a:srgbClr val="FFFFFF"/>
+                          </a:highlight>
+                        </a:rPr>
+                        <a:t>1</a:t>
+                      </a:r>
+                      <a:endParaRPr sz="1200">
+                        <a:solidFill>
+                          <a:srgbClr val="525252"/>
+                        </a:solidFill>
+                        <a:highlight>
+                          <a:srgbClr val="FFFFFF"/>
+                        </a:highlight>
+                      </a:endParaRPr>
+                    </a:p>
+                  </a:txBody>
+                  <a:tcPr marT="91425" marB="91425" marR="91425" marL="91425" anchor="ctr">
+                    <a:lnT cap="flat" cmpd="sng" w="9525">
+                      <a:solidFill>
+                        <a:srgbClr val="E0E0E0"/>
+                      </a:solidFill>
+                      <a:prstDash val="solid"/>
+                      <a:round/>
+                      <a:headEnd len="sm" w="sm" type="none"/>
+                      <a:tailEnd len="sm" w="sm" type="none"/>
+                    </a:lnT>
+                    <a:lnB cap="flat" cmpd="sng" w="9525">
+                      <a:solidFill>
+                        <a:srgbClr val="E0E0E0"/>
+                      </a:solidFill>
+                      <a:prstDash val="solid"/>
+                      <a:round/>
+                      <a:headEnd len="sm" w="sm" type="none"/>
+                      <a:tailEnd len="sm" w="sm" type="none"/>
+                    </a:lnB>
+                  </a:tcPr>
+                </a:tc>
+                <a:tc>
+                  <a:txBody>
+                    <a:bodyPr/>
+                    <a:lstStyle/>
+                    <a:p>
+                      <a:pPr indent="0" lvl="0" marL="0" rtl="0" algn="l">
+                        <a:lnSpc>
+                          <a:spcPct val="115000"/>
+                        </a:lnSpc>
+                        <a:spcBef>
+                          <a:spcPts val="0"/>
+                        </a:spcBef>
+                        <a:spcAft>
+                          <a:spcPts val="0"/>
+                        </a:spcAft>
+                        <a:buNone/>
+                      </a:pPr>
+                      <a:r>
+                        <a:rPr lang="zh-TW" sz="1200">
+                          <a:solidFill>
+                            <a:srgbClr val="525252"/>
+                          </a:solidFill>
+                          <a:highlight>
+                            <a:srgbClr val="FFFFFF"/>
+                          </a:highlight>
+                        </a:rPr>
+                        <a:t>4</a:t>
+                      </a:r>
+                      <a:endParaRPr sz="1200">
+                        <a:solidFill>
+                          <a:srgbClr val="525252"/>
+                        </a:solidFill>
+                        <a:highlight>
+                          <a:srgbClr val="FFFFFF"/>
+                        </a:highlight>
+                      </a:endParaRPr>
+                    </a:p>
+                  </a:txBody>
+                  <a:tcPr marT="91425" marB="91425" marR="91425" marL="91425" anchor="ctr">
+                    <a:lnT cap="flat" cmpd="sng" w="9525">
+                      <a:solidFill>
+                        <a:srgbClr val="E0E0E0"/>
+                      </a:solidFill>
+                      <a:prstDash val="solid"/>
+                      <a:round/>
+                      <a:headEnd len="sm" w="sm" type="none"/>
+                      <a:tailEnd len="sm" w="sm" type="none"/>
+                    </a:lnT>
+                    <a:lnB cap="flat" cmpd="sng" w="9525">
+                      <a:solidFill>
+                        <a:srgbClr val="E0E0E0"/>
+                      </a:solidFill>
+                      <a:prstDash val="solid"/>
+                      <a:round/>
+                      <a:headEnd len="sm" w="sm" type="none"/>
+                      <a:tailEnd len="sm" w="sm" type="none"/>
+                    </a:lnB>
+                  </a:tcPr>
+                </a:tc>
+              </a:tr>
+              <a:tr h="387850">
+                <a:tc>
+                  <a:txBody>
+                    <a:bodyPr/>
+                    <a:lstStyle/>
+                    <a:p>
+                      <a:pPr indent="0" lvl="0" marL="0" rtl="0" algn="l">
+                        <a:lnSpc>
+                          <a:spcPct val="115000"/>
+                        </a:lnSpc>
+                        <a:spcBef>
+                          <a:spcPts val="0"/>
+                        </a:spcBef>
+                        <a:spcAft>
+                          <a:spcPts val="0"/>
+                        </a:spcAft>
+                        <a:buNone/>
+                      </a:pPr>
+                      <a:r>
+                        <a:rPr lang="zh-TW" sz="1200">
+                          <a:solidFill>
+                            <a:srgbClr val="525252"/>
+                          </a:solidFill>
+                          <a:highlight>
+                            <a:srgbClr val="FFFFFF"/>
+                          </a:highlight>
+                        </a:rPr>
+                        <a:t>000000 - Best_Effort</a:t>
+                      </a:r>
+                      <a:endParaRPr sz="1200">
+                        <a:solidFill>
+                          <a:srgbClr val="525252"/>
+                        </a:solidFill>
+                        <a:highlight>
+                          <a:srgbClr val="FFFFFF"/>
+                        </a:highlight>
+                      </a:endParaRPr>
+                    </a:p>
+                  </a:txBody>
+                  <a:tcPr marT="91425" marB="91425" marR="91425" marL="91425" anchor="ctr">
+                    <a:lnT cap="flat" cmpd="sng" w="9525">
+                      <a:solidFill>
+                        <a:srgbClr val="E0E0E0"/>
+                      </a:solidFill>
+                      <a:prstDash val="solid"/>
+                      <a:round/>
+                      <a:headEnd len="sm" w="sm" type="none"/>
+                      <a:tailEnd len="sm" w="sm" type="none"/>
+                    </a:lnT>
+                    <a:lnB cap="flat" cmpd="sng" w="9525">
+                      <a:solidFill>
+                        <a:srgbClr val="E0E0E0"/>
+                      </a:solidFill>
+                      <a:prstDash val="solid"/>
+                      <a:round/>
+                      <a:headEnd len="sm" w="sm" type="none"/>
+                      <a:tailEnd len="sm" w="sm" type="none"/>
+                    </a:lnB>
+                    <a:solidFill>
+                      <a:srgbClr val="00FFFF"/>
+                    </a:solidFill>
+                  </a:tcPr>
+                </a:tc>
+                <a:tc>
+                  <a:txBody>
+                    <a:bodyPr/>
+                    <a:lstStyle/>
+                    <a:p>
+                      <a:pPr indent="0" lvl="0" marL="0" rtl="0" algn="l">
+                        <a:lnSpc>
+                          <a:spcPct val="115000"/>
+                        </a:lnSpc>
+                        <a:spcBef>
+                          <a:spcPts val="0"/>
+                        </a:spcBef>
+                        <a:spcAft>
+                          <a:spcPts val="0"/>
+                        </a:spcAft>
+                        <a:buNone/>
+                      </a:pPr>
+                      <a:r>
+                        <a:rPr lang="zh-TW" sz="1200">
+                          <a:solidFill>
+                            <a:srgbClr val="525252"/>
+                          </a:solidFill>
+                          <a:highlight>
+                            <a:srgbClr val="FFFFFF"/>
+                          </a:highlight>
+                        </a:rPr>
+                        <a:t>0</a:t>
+                      </a:r>
+                      <a:endParaRPr sz="1200">
+                        <a:solidFill>
+                          <a:srgbClr val="525252"/>
+                        </a:solidFill>
+                        <a:highlight>
+                          <a:srgbClr val="FFFFFF"/>
+                        </a:highlight>
+                      </a:endParaRPr>
+                    </a:p>
+                  </a:txBody>
+                  <a:tcPr marT="91425" marB="91425" marR="91425" marL="91425" anchor="ctr">
+                    <a:lnT cap="flat" cmpd="sng" w="9525">
+                      <a:solidFill>
+                        <a:srgbClr val="E0E0E0"/>
+                      </a:solidFill>
+                      <a:prstDash val="solid"/>
+                      <a:round/>
+                      <a:headEnd len="sm" w="sm" type="none"/>
+                      <a:tailEnd len="sm" w="sm" type="none"/>
+                    </a:lnT>
+                    <a:lnB cap="flat" cmpd="sng" w="9525">
+                      <a:solidFill>
+                        <a:srgbClr val="E0E0E0"/>
+                      </a:solidFill>
+                      <a:prstDash val="solid"/>
+                      <a:round/>
+                      <a:headEnd len="sm" w="sm" type="none"/>
+                      <a:tailEnd len="sm" w="sm" type="none"/>
+                    </a:lnB>
+                    <a:solidFill>
+                      <a:srgbClr val="00FFFF"/>
+                    </a:solidFill>
+                  </a:tcPr>
+                </a:tc>
+                <a:tc>
+                  <a:txBody>
+                    <a:bodyPr/>
+                    <a:lstStyle/>
+                    <a:p>
+                      <a:pPr indent="0" lvl="0" marL="0" rtl="0" algn="l">
+                        <a:lnSpc>
+                          <a:spcPct val="115000"/>
+                        </a:lnSpc>
+                        <a:spcBef>
+                          <a:spcPts val="0"/>
+                        </a:spcBef>
+                        <a:spcAft>
+                          <a:spcPts val="0"/>
+                        </a:spcAft>
+                        <a:buNone/>
+                      </a:pPr>
+                      <a:r>
+                        <a:rPr lang="zh-TW" sz="1200">
+                          <a:solidFill>
+                            <a:srgbClr val="525252"/>
+                          </a:solidFill>
+                          <a:highlight>
+                            <a:srgbClr val="FFFFFF"/>
+                          </a:highlight>
+                        </a:rPr>
+                        <a:t>4</a:t>
+                      </a:r>
+                      <a:endParaRPr sz="1200">
+                        <a:solidFill>
+                          <a:srgbClr val="525252"/>
+                        </a:solidFill>
+                        <a:highlight>
+                          <a:srgbClr val="FFFFFF"/>
+                        </a:highlight>
+                      </a:endParaRPr>
+                    </a:p>
+                  </a:txBody>
+                  <a:tcPr marT="91425" marB="91425" marR="91425" marL="91425" anchor="ctr">
+                    <a:lnT cap="flat" cmpd="sng" w="9525">
+                      <a:solidFill>
+                        <a:srgbClr val="E0E0E0"/>
+                      </a:solidFill>
+                      <a:prstDash val="solid"/>
+                      <a:round/>
+                      <a:headEnd len="sm" w="sm" type="none"/>
+                      <a:tailEnd len="sm" w="sm" type="none"/>
+                    </a:lnT>
+                    <a:lnB cap="flat" cmpd="sng" w="9525">
+                      <a:solidFill>
+                        <a:srgbClr val="E0E0E0"/>
+                      </a:solidFill>
+                      <a:prstDash val="solid"/>
+                      <a:round/>
+                      <a:headEnd len="sm" w="sm" type="none"/>
+                      <a:tailEnd len="sm" w="sm" type="none"/>
+                    </a:lnB>
+                  </a:tcPr>
+                </a:tc>
+              </a:tr>
+              <a:tr h="387850">
+                <a:tc>
+                  <a:txBody>
+                    <a:bodyPr/>
+                    <a:lstStyle/>
+                    <a:p>
+                      <a:pPr indent="0" lvl="0" marL="0" rtl="0" algn="l">
+                        <a:lnSpc>
+                          <a:spcPct val="115000"/>
+                        </a:lnSpc>
+                        <a:spcBef>
+                          <a:spcPts val="0"/>
+                        </a:spcBef>
+                        <a:spcAft>
+                          <a:spcPts val="0"/>
+                        </a:spcAft>
+                        <a:buNone/>
+                      </a:pPr>
+                      <a:r>
+                        <a:rPr lang="zh-TW" sz="1200">
+                          <a:solidFill>
+                            <a:srgbClr val="525252"/>
+                          </a:solidFill>
+                          <a:highlight>
+                            <a:srgbClr val="FFFFFF"/>
+                          </a:highlight>
+                        </a:rPr>
+                        <a:t>Any DSCP value</a:t>
+                      </a:r>
+                      <a:endParaRPr sz="1200">
+                        <a:solidFill>
+                          <a:srgbClr val="525252"/>
+                        </a:solidFill>
+                        <a:highlight>
+                          <a:srgbClr val="FFFFFF"/>
+                        </a:highlight>
+                      </a:endParaRPr>
+                    </a:p>
+                  </a:txBody>
+                  <a:tcPr marT="91425" marB="91425" marR="91425" marL="91425" anchor="ctr">
+                    <a:lnT cap="flat" cmpd="sng" w="9525">
+                      <a:solidFill>
+                        <a:srgbClr val="E0E0E0"/>
+                      </a:solidFill>
+                      <a:prstDash val="solid"/>
+                      <a:round/>
+                      <a:headEnd len="sm" w="sm" type="none"/>
+                      <a:tailEnd len="sm" w="sm" type="none"/>
+                    </a:lnT>
+                    <a:lnB cap="flat" cmpd="sng" w="9525">
+                      <a:solidFill>
+                        <a:srgbClr val="E0E0E0"/>
+                      </a:solidFill>
+                      <a:prstDash val="solid"/>
+                      <a:round/>
+                      <a:headEnd len="sm" w="sm" type="none"/>
+                      <a:tailEnd len="sm" w="sm" type="none"/>
+                    </a:lnB>
+                  </a:tcPr>
+                </a:tc>
+                <a:tc>
+                  <a:txBody>
+                    <a:bodyPr/>
+                    <a:lstStyle/>
+                    <a:p>
+                      <a:pPr indent="0" lvl="0" marL="0" rtl="0" algn="l">
+                        <a:lnSpc>
+                          <a:spcPct val="115000"/>
+                        </a:lnSpc>
+                        <a:spcBef>
+                          <a:spcPts val="0"/>
+                        </a:spcBef>
+                        <a:spcAft>
+                          <a:spcPts val="0"/>
+                        </a:spcAft>
+                        <a:buNone/>
+                      </a:pPr>
+                      <a:r>
+                        <a:rPr lang="zh-TW" sz="1200">
+                          <a:solidFill>
+                            <a:srgbClr val="525252"/>
+                          </a:solidFill>
+                          <a:highlight>
+                            <a:srgbClr val="FFFFFF"/>
+                          </a:highlight>
+                        </a:rPr>
+                        <a:t>0</a:t>
+                      </a:r>
+                      <a:endParaRPr sz="1200">
+                        <a:solidFill>
+                          <a:srgbClr val="525252"/>
+                        </a:solidFill>
+                        <a:highlight>
+                          <a:srgbClr val="FFFFFF"/>
+                        </a:highlight>
+                      </a:endParaRPr>
+                    </a:p>
+                  </a:txBody>
+                  <a:tcPr marT="91425" marB="91425" marR="91425" marL="91425" anchor="ctr">
+                    <a:lnT cap="flat" cmpd="sng" w="9525">
+                      <a:solidFill>
+                        <a:srgbClr val="E0E0E0"/>
+                      </a:solidFill>
+                      <a:prstDash val="solid"/>
+                      <a:round/>
+                      <a:headEnd len="sm" w="sm" type="none"/>
+                      <a:tailEnd len="sm" w="sm" type="none"/>
+                    </a:lnT>
+                    <a:lnB cap="flat" cmpd="sng" w="9525">
+                      <a:solidFill>
+                        <a:srgbClr val="E0E0E0"/>
+                      </a:solidFill>
+                      <a:prstDash val="solid"/>
+                      <a:round/>
+                      <a:headEnd len="sm" w="sm" type="none"/>
+                      <a:tailEnd len="sm" w="sm" type="none"/>
+                    </a:lnB>
+                  </a:tcPr>
+                </a:tc>
+                <a:tc>
+                  <a:txBody>
+                    <a:bodyPr/>
+                    <a:lstStyle/>
+                    <a:p>
+                      <a:pPr indent="0" lvl="0" marL="0" rtl="0" algn="l">
+                        <a:lnSpc>
+                          <a:spcPct val="115000"/>
+                        </a:lnSpc>
+                        <a:spcBef>
+                          <a:spcPts val="0"/>
+                        </a:spcBef>
+                        <a:spcAft>
+                          <a:spcPts val="0"/>
+                        </a:spcAft>
+                        <a:buNone/>
+                      </a:pPr>
+                      <a:r>
+                        <a:rPr lang="zh-TW" sz="1200">
+                          <a:solidFill>
+                            <a:srgbClr val="525252"/>
+                          </a:solidFill>
+                          <a:highlight>
+                            <a:srgbClr val="FFFFFF"/>
+                          </a:highlight>
+                        </a:rPr>
+                        <a:t>4</a:t>
+                      </a:r>
+                      <a:endParaRPr sz="1200">
+                        <a:solidFill>
+                          <a:srgbClr val="525252"/>
+                        </a:solidFill>
+                        <a:highlight>
+                          <a:srgbClr val="FFFFFF"/>
+                        </a:highlight>
+                      </a:endParaRPr>
+                    </a:p>
+                  </a:txBody>
+                  <a:tcPr marT="91425" marB="91425" marR="91425" marL="91425" anchor="ctr">
+                    <a:lnT cap="flat" cmpd="sng" w="9525">
+                      <a:solidFill>
+                        <a:srgbClr val="E0E0E0"/>
+                      </a:solidFill>
+                      <a:prstDash val="solid"/>
+                      <a:round/>
+                      <a:headEnd len="sm" w="sm" type="none"/>
+                      <a:tailEnd len="sm" w="sm" type="none"/>
+                    </a:lnT>
+                    <a:lnB cap="flat" cmpd="sng" w="9525">
+                      <a:solidFill>
+                        <a:srgbClr val="E0E0E0"/>
+                      </a:solidFill>
+                      <a:prstDash val="solid"/>
+                      <a:round/>
+                      <a:headEnd len="sm" w="sm" type="none"/>
+                      <a:tailEnd len="sm" w="sm" type="none"/>
+                    </a:lnB>
+                  </a:tcPr>
+                </a:tc>
+              </a:tr>
+            </a:tbl>
+          </a:graphicData>
+        </a:graphic>
+      </p:graphicFrame>
+      <p:sp>
+        <p:nvSpPr>
+          <p:cNvPr id="185" name="Google Shape;185;p29"/>
+          <p:cNvSpPr txBox="1"/>
+          <p:nvPr/>
+        </p:nvSpPr>
+        <p:spPr>
+          <a:xfrm>
+            <a:off x="208350" y="4310125"/>
+            <a:ext cx="7552500" cy="520800"/>
+          </a:xfrm>
+          <a:prstGeom prst="rect">
+            <a:avLst/>
+          </a:prstGeom>
+          <a:noFill/>
+          <a:ln>
+            <a:noFill/>
+          </a:ln>
+        </p:spPr>
+        <p:txBody>
+          <a:bodyPr anchorCtr="0" anchor="t" bIns="91425" lIns="91425" spcFirstLastPara="1" rIns="91425" wrap="square" tIns="91425">
+            <a:noAutofit/>
+          </a:bodyPr>
+          <a:lstStyle/>
+          <a:p>
+            <a:pPr indent="0" lvl="0" marL="0" rtl="0" algn="l">
+              <a:spcBef>
+                <a:spcPts val="0"/>
+              </a:spcBef>
+              <a:spcAft>
+                <a:spcPts val="0"/>
+              </a:spcAft>
+              <a:buNone/>
+            </a:pPr>
+            <a:r>
+              <a:rPr lang="zh-TW" sz="1800">
+                <a:solidFill>
+                  <a:schemeClr val="dk2"/>
+                </a:solidFill>
+              </a:rPr>
+              <a:t>https://www.ibm.com/docs/en/zos/2.3.0?topic=tagging-specific-interface</a:t>
+            </a:r>
+            <a:endParaRPr sz="1800">
+              <a:solidFill>
+                <a:schemeClr val="dk2"/>
+              </a:solidFill>
+            </a:endParaRPr>
+          </a:p>
+        </p:txBody>
+      </p:sp>
+    </p:spTree>
+  </p:cSld>
+  <p:clrMapOvr>
+    <a:masterClrMapping/>
+  </p:clrMapOvr>
+</p:sld>
+</file>
+
+<file path=ppt/slides/slide18.xml><?xml version="1.0" encoding="utf-8"?>
+<p:sld xmlns:a="http://schemas.openxmlformats.org/drawingml/2006/main" xmlns:r="http://schemas.openxmlformats.org/officeDocument/2006/relationships" xmlns:mc="http://schemas.openxmlformats.org/markup-compatibility/2006" xmlns:mv="urn:schemas-microsoft-com:mac:vml" xmlns:p="http://schemas.openxmlformats.org/presentationml/2006/main" xmlns:c="http://schemas.openxmlformats.org/drawingml/2006/chart" xmlns:dgm="http://schemas.openxmlformats.org/drawingml/2006/diagram" xmlns:o="urn:schemas-microsoft-com:office:office" xmlns:v="urn:schemas-microsoft-com:vml" xmlns:pvml="urn:schemas-microsoft-com:office:powerpoint" xmlns:com="http://schemas.openxmlformats.org/drawingml/2006/compatibility" xmlns:p14="http://schemas.microsoft.com/office/powerpoint/2010/main" xmlns:p15="http://schemas.microsoft.com/office/powerpoint/2012/main" xmlns:ahyp="http://schemas.microsoft.com/office/drawing/2018/hyperlinkcolor">
+  <p:cSld>
+    <p:spTree>
+      <p:nvGrpSpPr>
+        <p:cNvPr id="189" name="Shape 189"/>
+        <p:cNvGrpSpPr/>
+        <p:nvPr/>
+      </p:nvGrpSpPr>
+      <p:grpSpPr>
+        <a:xfrm>
+          <a:off x="0" y="0"/>
+          <a:ext cx="0" cy="0"/>
+          <a:chOff x="0" y="0"/>
+          <a:chExt cx="0" cy="0"/>
+        </a:xfrm>
+      </p:grpSpPr>
+      <p:sp>
+        <p:nvSpPr>
+          <p:cNvPr id="190" name="Google Shape;190;p30"/>
+          <p:cNvSpPr txBox="1"/>
+          <p:nvPr>
+            <p:ph type="title"/>
+          </p:nvPr>
+        </p:nvSpPr>
+        <p:spPr>
+          <a:xfrm>
+            <a:off x="389825" y="0"/>
+            <a:ext cx="8520600" cy="270600"/>
+          </a:xfrm>
+          <a:prstGeom prst="rect">
+            <a:avLst/>
+          </a:prstGeom>
+        </p:spPr>
+        <p:txBody>
+          <a:bodyPr anchorCtr="0" anchor="t" bIns="91425" lIns="91425" spcFirstLastPara="1" rIns="91425" wrap="square" tIns="91425">
+            <a:normAutofit fontScale="90000"/>
+          </a:bodyPr>
+          <a:lstStyle/>
+          <a:p>
+            <a:pPr indent="0" lvl="0" marL="0" rtl="0" algn="l">
+              <a:spcBef>
+                <a:spcPts val="0"/>
+              </a:spcBef>
+              <a:spcAft>
+                <a:spcPts val="0"/>
+              </a:spcAft>
+              <a:buNone/>
+            </a:pPr>
+            <a:r>
+              <a:rPr lang="zh-TW"/>
+              <a:t>11. Layer 3 Qos</a:t>
+            </a:r>
+            <a:endParaRPr/>
+          </a:p>
+        </p:txBody>
+      </p:sp>
+      <p:sp>
+        <p:nvSpPr>
+          <p:cNvPr id="191" name="Google Shape;191;p30"/>
+          <p:cNvSpPr txBox="1"/>
+          <p:nvPr>
+            <p:ph idx="1" type="body"/>
+          </p:nvPr>
+        </p:nvSpPr>
+        <p:spPr>
+          <a:xfrm>
+            <a:off x="311700" y="475450"/>
+            <a:ext cx="8520600" cy="2154900"/>
+          </a:xfrm>
+          <a:prstGeom prst="rect">
+            <a:avLst/>
+          </a:prstGeom>
+        </p:spPr>
+        <p:txBody>
+          <a:bodyPr anchorCtr="0" anchor="t" bIns="91425" lIns="91425" spcFirstLastPara="1" rIns="91425" wrap="square" tIns="91425">
+            <a:normAutofit/>
+          </a:bodyPr>
+          <a:lstStyle/>
+          <a:p>
+            <a:pPr indent="0" lvl="0" marL="0" rtl="0" algn="l">
+              <a:spcBef>
+                <a:spcPts val="0"/>
+              </a:spcBef>
+              <a:spcAft>
+                <a:spcPts val="1200"/>
+              </a:spcAft>
+              <a:buNone/>
+            </a:pPr>
+            <a:r>
+              <a:rPr lang="zh-TW" sz="1400"/>
+              <a:t>DiffServ is a coarse-grained, class-based mechanism for traffic management. In contrast, IntServ is a fine-grained, flow-based mechanism. DiffServ relies on a mechanism to classify and mark packets as belonging to a specific class. DiffServ-aware routers implement per-hop behaviors (PHBs), which define the packet-forwarding properties associated with a class of traffic. Different PHBs may be defined to offer, for example, low-loss or low-latency service.</a:t>
+            </a:r>
+            <a:endParaRPr sz="1400"/>
+          </a:p>
+        </p:txBody>
+      </p:sp>
+      <p:pic>
+        <p:nvPicPr>
+          <p:cNvPr id="192" name="Google Shape;192;p30"/>
+          <p:cNvPicPr preferRelativeResize="0"/>
+          <p:nvPr/>
+        </p:nvPicPr>
+        <p:blipFill>
+          <a:blip r:embed="rId3">
+            <a:alphaModFix/>
+          </a:blip>
+          <a:stretch>
+            <a:fillRect/>
+          </a:stretch>
+        </p:blipFill>
+        <p:spPr>
+          <a:xfrm>
+            <a:off x="104175" y="1734275"/>
+            <a:ext cx="8806249" cy="3500375"/>
+          </a:xfrm>
+          <a:prstGeom prst="rect">
+            <a:avLst/>
+          </a:prstGeom>
+          <a:noFill/>
+          <a:ln>
+            <a:noFill/>
+          </a:ln>
+        </p:spPr>
+      </p:pic>
     </p:spTree>
   </p:cSld>
   <p:clrMapOvr>
@@ -8028,7 +11124,7 @@
         <p:spPr>
           <a:xfrm>
             <a:off x="352825" y="396925"/>
-            <a:ext cx="8173800" cy="2174700"/>
+            <a:ext cx="8173800" cy="3249000"/>
           </a:xfrm>
           <a:prstGeom prst="rect">
             <a:avLst/>
@@ -8067,7 +11163,7 @@
             </a:endParaRPr>
           </a:p>
           <a:p>
-            <a:pPr indent="-317500" lvl="0" marL="457200" rtl="0" algn="l">
+            <a:pPr indent="-330200" lvl="0" marL="457200" rtl="0" algn="l">
               <a:spcBef>
                 <a:spcPts val="0"/>
               </a:spcBef>
@@ -8075,16 +11171,16 @@
                 <a:spcPts val="0"/>
               </a:spcAft>
               <a:buClr>
-                <a:schemeClr val="dk2"/>
+                <a:schemeClr val="dk1"/>
               </a:buClr>
-              <a:buSzPts val="1400"/>
+              <a:buSzPts val="1600"/>
               <a:buFont typeface="Calibri"/>
               <a:buAutoNum type="arabicPeriod"/>
             </a:pPr>
             <a:r>
-              <a:rPr lang="zh-TW">
-                <a:solidFill>
-                  <a:schemeClr val="dk2"/>
+              <a:rPr lang="zh-TW" sz="1600">
+                <a:solidFill>
+                  <a:schemeClr val="dk1"/>
                 </a:solidFill>
                 <a:latin typeface="Calibri"/>
                 <a:ea typeface="Calibri"/>
@@ -8093,81 +11189,7 @@
               </a:rPr>
               <a:t>5G NSA vs 5G SA</a:t>
             </a:r>
-            <a:endParaRPr>
-              <a:solidFill>
-                <a:schemeClr val="dk2"/>
-              </a:solidFill>
-              <a:latin typeface="Calibri"/>
-              <a:ea typeface="Calibri"/>
-              <a:cs typeface="Calibri"/>
-              <a:sym typeface="Calibri"/>
-            </a:endParaRPr>
-          </a:p>
-          <a:p>
-            <a:pPr indent="-317500" lvl="0" marL="457200" rtl="0" algn="l">
-              <a:spcBef>
-                <a:spcPts val="0"/>
-              </a:spcBef>
-              <a:spcAft>
-                <a:spcPts val="0"/>
-              </a:spcAft>
-              <a:buClr>
-                <a:schemeClr val="dk2"/>
-              </a:buClr>
-              <a:buSzPts val="1400"/>
-              <a:buFont typeface="Calibri"/>
-              <a:buAutoNum type="arabicPeriod"/>
-            </a:pPr>
-            <a:r>
-              <a:rPr lang="zh-TW">
-                <a:solidFill>
-                  <a:schemeClr val="dk2"/>
-                </a:solidFill>
-                <a:latin typeface="Calibri"/>
-                <a:ea typeface="Calibri"/>
-                <a:cs typeface="Calibri"/>
-                <a:sym typeface="Calibri"/>
-              </a:rPr>
-              <a:t>5G SA architecture</a:t>
-            </a:r>
-            <a:endParaRPr>
-              <a:solidFill>
-                <a:schemeClr val="dk2"/>
-              </a:solidFill>
-              <a:latin typeface="Calibri"/>
-              <a:ea typeface="Calibri"/>
-              <a:cs typeface="Calibri"/>
-              <a:sym typeface="Calibri"/>
-            </a:endParaRPr>
-          </a:p>
-          <a:p>
-            <a:pPr indent="-317500" lvl="0" marL="457200" rtl="0" algn="l">
-              <a:spcBef>
-                <a:spcPts val="0"/>
-              </a:spcBef>
-              <a:spcAft>
-                <a:spcPts val="0"/>
-              </a:spcAft>
-              <a:buClr>
-                <a:schemeClr val="dk2"/>
-              </a:buClr>
-              <a:buSzPts val="1400"/>
-              <a:buFont typeface="Calibri"/>
-              <a:buAutoNum type="arabicPeriod"/>
-            </a:pPr>
-            <a:r>
-              <a:rPr lang="zh-TW">
-                <a:solidFill>
-                  <a:schemeClr val="dk1"/>
-                </a:solidFill>
-                <a:latin typeface="Calibri"/>
-                <a:ea typeface="Calibri"/>
-                <a:cs typeface="Calibri"/>
-                <a:sym typeface="Calibri"/>
-              </a:rPr>
-              <a:t>5G Core Network</a:t>
-            </a:r>
-            <a:endParaRPr>
+            <a:endParaRPr sz="1600">
               <a:solidFill>
                 <a:schemeClr val="dk1"/>
               </a:solidFill>
@@ -8178,7 +11200,7 @@
             </a:endParaRPr>
           </a:p>
           <a:p>
-            <a:pPr indent="-317500" lvl="0" marL="457200" rtl="0" algn="l">
+            <a:pPr indent="-330200" lvl="0" marL="457200" rtl="0" algn="l">
               <a:spcBef>
                 <a:spcPts val="0"/>
               </a:spcBef>
@@ -8186,14 +11208,14 @@
                 <a:spcPts val="0"/>
               </a:spcAft>
               <a:buClr>
-                <a:schemeClr val="dk2"/>
+                <a:schemeClr val="dk1"/>
               </a:buClr>
-              <a:buSzPts val="1400"/>
+              <a:buSzPts val="1600"/>
               <a:buFont typeface="Calibri"/>
               <a:buAutoNum type="arabicPeriod"/>
             </a:pPr>
             <a:r>
-              <a:rPr lang="zh-TW">
+              <a:rPr lang="zh-TW" sz="1600">
                 <a:solidFill>
                   <a:schemeClr val="dk1"/>
                 </a:solidFill>
@@ -8202,11 +11224,11 @@
                 <a:cs typeface="Calibri"/>
                 <a:sym typeface="Calibri"/>
               </a:rPr>
-              <a:t>5GC example: Magma</a:t>
-            </a:r>
-            <a:endParaRPr>
+              <a:t>5G SA architecture</a:t>
+            </a:r>
+            <a:endParaRPr sz="1600">
               <a:solidFill>
-                <a:schemeClr val="dk2"/>
+                <a:schemeClr val="dk1"/>
               </a:solidFill>
               <a:latin typeface="Calibri"/>
               <a:ea typeface="Calibri"/>
@@ -8215,10 +11237,7 @@
             </a:endParaRPr>
           </a:p>
           <a:p>
-            <a:pPr indent="-317500" lvl="0" marL="457200" rtl="0" algn="l">
-              <a:lnSpc>
-                <a:spcPct val="115000"/>
-              </a:lnSpc>
+            <a:pPr indent="-330200" lvl="0" marL="457200" rtl="0" algn="l">
               <a:spcBef>
                 <a:spcPts val="0"/>
               </a:spcBef>
@@ -8226,27 +11245,27 @@
                 <a:spcPts val="0"/>
               </a:spcAft>
               <a:buClr>
-                <a:schemeClr val="dk2"/>
+                <a:schemeClr val="dk1"/>
               </a:buClr>
-              <a:buSzPts val="1400"/>
+              <a:buSzPts val="1600"/>
               <a:buFont typeface="Calibri"/>
               <a:buAutoNum type="arabicPeriod"/>
             </a:pPr>
             <a:r>
-              <a:rPr lang="zh-TW">
-                <a:solidFill>
-                  <a:schemeClr val="dk2"/>
+              <a:rPr lang="zh-TW" sz="1600">
+                <a:solidFill>
+                  <a:schemeClr val="dk1"/>
                 </a:solidFill>
                 <a:latin typeface="Calibri"/>
                 <a:ea typeface="Calibri"/>
                 <a:cs typeface="Calibri"/>
                 <a:sym typeface="Calibri"/>
               </a:rPr>
-              <a:t>Test Beds related to 5G UE (User equipment)</a:t>
-            </a:r>
-            <a:endParaRPr>
+              <a:t>5G Core Network</a:t>
+            </a:r>
+            <a:endParaRPr sz="1600">
               <a:solidFill>
-                <a:schemeClr val="dk2"/>
+                <a:schemeClr val="dk1"/>
               </a:solidFill>
               <a:latin typeface="Calibri"/>
               <a:ea typeface="Calibri"/>
@@ -8255,10 +11274,7 @@
             </a:endParaRPr>
           </a:p>
           <a:p>
-            <a:pPr indent="-317500" lvl="0" marL="457200" rtl="0" algn="l">
-              <a:lnSpc>
-                <a:spcPct val="115000"/>
-              </a:lnSpc>
+            <a:pPr indent="-330200" lvl="0" marL="457200" rtl="0" algn="l">
               <a:spcBef>
                 <a:spcPts val="0"/>
               </a:spcBef>
@@ -8266,27 +11282,27 @@
                 <a:spcPts val="0"/>
               </a:spcAft>
               <a:buClr>
-                <a:schemeClr val="dk2"/>
+                <a:schemeClr val="dk1"/>
               </a:buClr>
-              <a:buSzPts val="1400"/>
+              <a:buSzPts val="1600"/>
               <a:buFont typeface="Calibri"/>
               <a:buAutoNum type="arabicPeriod"/>
             </a:pPr>
             <a:r>
-              <a:rPr lang="zh-TW">
-                <a:solidFill>
-                  <a:schemeClr val="dk2"/>
+              <a:rPr lang="zh-TW" sz="1600">
+                <a:solidFill>
+                  <a:schemeClr val="dk1"/>
                 </a:solidFill>
                 <a:latin typeface="Calibri"/>
                 <a:ea typeface="Calibri"/>
                 <a:cs typeface="Calibri"/>
                 <a:sym typeface="Calibri"/>
               </a:rPr>
-              <a:t>Test Beds related to 5G CoreNetwork (CD-Router)</a:t>
-            </a:r>
-            <a:endParaRPr>
+              <a:t>5GC opensource 1: Magma</a:t>
+            </a:r>
+            <a:endParaRPr sz="1600">
               <a:solidFill>
-                <a:schemeClr val="dk2"/>
+                <a:schemeClr val="dk1"/>
               </a:solidFill>
               <a:latin typeface="Calibri"/>
               <a:ea typeface="Calibri"/>
@@ -8295,10 +11311,7 @@
             </a:endParaRPr>
           </a:p>
           <a:p>
-            <a:pPr indent="-317500" lvl="0" marL="457200" rtl="0" algn="l">
-              <a:lnSpc>
-                <a:spcPct val="115000"/>
-              </a:lnSpc>
+            <a:pPr indent="-330200" lvl="0" marL="457200" rtl="0" algn="l">
               <a:spcBef>
                 <a:spcPts val="0"/>
               </a:spcBef>
@@ -8306,27 +11319,317 @@
                 <a:spcPts val="0"/>
               </a:spcAft>
               <a:buClr>
-                <a:schemeClr val="dk2"/>
+                <a:schemeClr val="dk1"/>
               </a:buClr>
-              <a:buSzPts val="1400"/>
+              <a:buSzPts val="1600"/>
               <a:buFont typeface="Calibri"/>
               <a:buAutoNum type="arabicPeriod"/>
             </a:pPr>
             <a:r>
-              <a:rPr lang="zh-TW">
-                <a:solidFill>
-                  <a:schemeClr val="dk2"/>
+              <a:rPr lang="zh-TW" sz="1600">
+                <a:solidFill>
+                  <a:schemeClr val="dk1"/>
                 </a:solidFill>
                 <a:latin typeface="Calibri"/>
                 <a:ea typeface="Calibri"/>
                 <a:cs typeface="Calibri"/>
                 <a:sym typeface="Calibri"/>
               </a:rPr>
+              <a:t>5GC opensource 2 : open5gs</a:t>
+            </a:r>
+            <a:endParaRPr sz="1600">
+              <a:solidFill>
+                <a:schemeClr val="dk1"/>
+              </a:solidFill>
+              <a:latin typeface="Calibri"/>
+              <a:ea typeface="Calibri"/>
+              <a:cs typeface="Calibri"/>
+              <a:sym typeface="Calibri"/>
+            </a:endParaRPr>
+          </a:p>
+          <a:p>
+            <a:pPr indent="-330200" lvl="0" marL="457200" rtl="0" algn="l">
+              <a:spcBef>
+                <a:spcPts val="0"/>
+              </a:spcBef>
+              <a:spcAft>
+                <a:spcPts val="0"/>
+              </a:spcAft>
+              <a:buClr>
+                <a:schemeClr val="dk1"/>
+              </a:buClr>
+              <a:buSzPts val="1600"/>
+              <a:buFont typeface="Calibri"/>
+              <a:buAutoNum type="arabicPeriod"/>
+            </a:pPr>
+            <a:r>
+              <a:rPr lang="zh-TW" sz="1600">
+                <a:solidFill>
+                  <a:schemeClr val="dk1"/>
+                </a:solidFill>
+                <a:latin typeface="Calibri"/>
+                <a:ea typeface="Calibri"/>
+                <a:cs typeface="Calibri"/>
+                <a:sym typeface="Calibri"/>
+              </a:rPr>
+              <a:t>Test Beds releated to 5G UE(</a:t>
+            </a:r>
+            <a:r>
+              <a:rPr lang="zh-TW" sz="1600">
+                <a:solidFill>
+                  <a:schemeClr val="dk1"/>
+                </a:solidFill>
+                <a:highlight>
+                  <a:srgbClr val="FFFFFF"/>
+                </a:highlight>
+                <a:latin typeface="Calibri"/>
+                <a:ea typeface="Calibri"/>
+                <a:cs typeface="Calibri"/>
+                <a:sym typeface="Calibri"/>
+              </a:rPr>
+              <a:t>UERANSIM</a:t>
+            </a:r>
+            <a:r>
+              <a:rPr lang="zh-TW" sz="1600">
+                <a:solidFill>
+                  <a:schemeClr val="dk1"/>
+                </a:solidFill>
+                <a:latin typeface="Calibri"/>
+                <a:ea typeface="Calibri"/>
+                <a:cs typeface="Calibri"/>
+                <a:sym typeface="Calibri"/>
+              </a:rPr>
+              <a:t>)</a:t>
+            </a:r>
+            <a:endParaRPr sz="1600">
+              <a:solidFill>
+                <a:schemeClr val="dk1"/>
+              </a:solidFill>
+              <a:latin typeface="Calibri"/>
+              <a:ea typeface="Calibri"/>
+              <a:cs typeface="Calibri"/>
+              <a:sym typeface="Calibri"/>
+            </a:endParaRPr>
+          </a:p>
+          <a:p>
+            <a:pPr indent="-330200" lvl="0" marL="457200" rtl="0" algn="l">
+              <a:lnSpc>
+                <a:spcPct val="115000"/>
+              </a:lnSpc>
+              <a:spcBef>
+                <a:spcPts val="0"/>
+              </a:spcBef>
+              <a:spcAft>
+                <a:spcPts val="0"/>
+              </a:spcAft>
+              <a:buClr>
+                <a:schemeClr val="dk1"/>
+              </a:buClr>
+              <a:buSzPts val="1600"/>
+              <a:buFont typeface="Calibri"/>
+              <a:buAutoNum type="arabicPeriod"/>
+            </a:pPr>
+            <a:r>
+              <a:rPr lang="zh-TW" sz="1600">
+                <a:solidFill>
+                  <a:schemeClr val="dk1"/>
+                </a:solidFill>
+                <a:latin typeface="Calibri"/>
+                <a:ea typeface="Calibri"/>
+                <a:cs typeface="Calibri"/>
+                <a:sym typeface="Calibri"/>
+              </a:rPr>
+              <a:t>Test Beds related to 5G UE (User equipment)</a:t>
+            </a:r>
+            <a:endParaRPr sz="1600">
+              <a:solidFill>
+                <a:schemeClr val="dk1"/>
+              </a:solidFill>
+              <a:latin typeface="Calibri"/>
+              <a:ea typeface="Calibri"/>
+              <a:cs typeface="Calibri"/>
+              <a:sym typeface="Calibri"/>
+            </a:endParaRPr>
+          </a:p>
+          <a:p>
+            <a:pPr indent="-330200" lvl="0" marL="457200" rtl="0" algn="l">
+              <a:lnSpc>
+                <a:spcPct val="115000"/>
+              </a:lnSpc>
+              <a:spcBef>
+                <a:spcPts val="0"/>
+              </a:spcBef>
+              <a:spcAft>
+                <a:spcPts val="0"/>
+              </a:spcAft>
+              <a:buClr>
+                <a:schemeClr val="dk1"/>
+              </a:buClr>
+              <a:buSzPts val="1600"/>
+              <a:buFont typeface="Calibri"/>
+              <a:buAutoNum type="arabicPeriod"/>
+            </a:pPr>
+            <a:r>
+              <a:rPr lang="zh-TW" sz="1600">
+                <a:solidFill>
+                  <a:schemeClr val="dk1"/>
+                </a:solidFill>
+                <a:latin typeface="Calibri"/>
+                <a:ea typeface="Calibri"/>
+                <a:cs typeface="Calibri"/>
+                <a:sym typeface="Calibri"/>
+              </a:rPr>
+              <a:t>Test Beds related to 5G CoreNetwork (CD-Router)</a:t>
+            </a:r>
+            <a:endParaRPr sz="1600">
+              <a:solidFill>
+                <a:schemeClr val="dk1"/>
+              </a:solidFill>
+              <a:latin typeface="Calibri"/>
+              <a:ea typeface="Calibri"/>
+              <a:cs typeface="Calibri"/>
+              <a:sym typeface="Calibri"/>
+            </a:endParaRPr>
+          </a:p>
+          <a:p>
+            <a:pPr indent="-330200" lvl="0" marL="457200" rtl="0" algn="l">
+              <a:lnSpc>
+                <a:spcPct val="115000"/>
+              </a:lnSpc>
+              <a:spcBef>
+                <a:spcPts val="0"/>
+              </a:spcBef>
+              <a:spcAft>
+                <a:spcPts val="0"/>
+              </a:spcAft>
+              <a:buClr>
+                <a:schemeClr val="dk1"/>
+              </a:buClr>
+              <a:buSzPts val="1600"/>
+              <a:buFont typeface="Calibri"/>
+              <a:buAutoNum type="arabicPeriod"/>
+            </a:pPr>
+            <a:r>
+              <a:rPr lang="zh-TW" sz="1600">
+                <a:solidFill>
+                  <a:schemeClr val="dk1"/>
+                </a:solidFill>
+                <a:latin typeface="Calibri"/>
+                <a:ea typeface="Calibri"/>
+                <a:cs typeface="Calibri"/>
+                <a:sym typeface="Calibri"/>
+              </a:rPr>
               <a:t>5G testing reference from AWS</a:t>
             </a:r>
-            <a:endParaRPr>
+            <a:endParaRPr sz="1600">
               <a:solidFill>
-                <a:schemeClr val="dk2"/>
+                <a:schemeClr val="dk1"/>
+              </a:solidFill>
+              <a:latin typeface="Calibri"/>
+              <a:ea typeface="Calibri"/>
+              <a:cs typeface="Calibri"/>
+              <a:sym typeface="Calibri"/>
+            </a:endParaRPr>
+          </a:p>
+          <a:p>
+            <a:pPr indent="-330200" lvl="0" marL="457200" rtl="0" algn="l">
+              <a:lnSpc>
+                <a:spcPct val="115000"/>
+              </a:lnSpc>
+              <a:spcBef>
+                <a:spcPts val="0"/>
+              </a:spcBef>
+              <a:spcAft>
+                <a:spcPts val="0"/>
+              </a:spcAft>
+              <a:buClr>
+                <a:schemeClr val="dk1"/>
+              </a:buClr>
+              <a:buSzPts val="1600"/>
+              <a:buFont typeface="Calibri"/>
+              <a:buAutoNum type="arabicPeriod"/>
+            </a:pPr>
+            <a:r>
+              <a:rPr lang="zh-TW" sz="1600">
+                <a:solidFill>
+                  <a:schemeClr val="dk1"/>
+                </a:solidFill>
+                <a:latin typeface="Calibri"/>
+                <a:ea typeface="Calibri"/>
+                <a:cs typeface="Calibri"/>
+                <a:sym typeface="Calibri"/>
+              </a:rPr>
+              <a:t>Layer 2 Qos 802.1p (DSCP) test reference</a:t>
+            </a:r>
+            <a:endParaRPr sz="1600">
+              <a:solidFill>
+                <a:schemeClr val="dk1"/>
+              </a:solidFill>
+              <a:latin typeface="Calibri"/>
+              <a:ea typeface="Calibri"/>
+              <a:cs typeface="Calibri"/>
+              <a:sym typeface="Calibri"/>
+            </a:endParaRPr>
+          </a:p>
+          <a:p>
+            <a:pPr indent="-330200" lvl="0" marL="457200" rtl="0" algn="l">
+              <a:lnSpc>
+                <a:spcPct val="115000"/>
+              </a:lnSpc>
+              <a:spcBef>
+                <a:spcPts val="0"/>
+              </a:spcBef>
+              <a:spcAft>
+                <a:spcPts val="0"/>
+              </a:spcAft>
+              <a:buClr>
+                <a:schemeClr val="dk1"/>
+              </a:buClr>
+              <a:buSzPts val="1600"/>
+              <a:buFont typeface="Calibri"/>
+              <a:buAutoNum type="arabicPeriod"/>
+            </a:pPr>
+            <a:r>
+              <a:rPr lang="zh-TW" sz="1600">
+                <a:solidFill>
+                  <a:schemeClr val="dk1"/>
+                </a:solidFill>
+                <a:latin typeface="Calibri"/>
+                <a:ea typeface="Calibri"/>
+                <a:cs typeface="Calibri"/>
+                <a:sym typeface="Calibri"/>
+              </a:rPr>
+              <a:t>Layer 3 Qos (PHB)</a:t>
+            </a:r>
+            <a:endParaRPr sz="1600">
+              <a:solidFill>
+                <a:schemeClr val="dk1"/>
+              </a:solidFill>
+              <a:latin typeface="Calibri"/>
+              <a:ea typeface="Calibri"/>
+              <a:cs typeface="Calibri"/>
+              <a:sym typeface="Calibri"/>
+            </a:endParaRPr>
+          </a:p>
+          <a:p>
+            <a:pPr indent="0" lvl="0" marL="0" rtl="0" algn="l">
+              <a:lnSpc>
+                <a:spcPct val="115000"/>
+              </a:lnSpc>
+              <a:spcBef>
+                <a:spcPts val="1200"/>
+              </a:spcBef>
+              <a:spcAft>
+                <a:spcPts val="1200"/>
+              </a:spcAft>
+              <a:buNone/>
+            </a:pPr>
+            <a:r>
+              <a:t/>
+            </a:r>
+            <a:endParaRPr sz="1600">
+              <a:solidFill>
+                <a:schemeClr val="dk1"/>
               </a:solidFill>
               <a:latin typeface="Calibri"/>
               <a:ea typeface="Calibri"/>
